--- a/千萬個理由.pptx
+++ b/千萬個理由.pptx
@@ -5,19 +5,21 @@
     <p:sldMasterId id="2147483660" r:id="rId1"/>
   </p:sldMasterIdLst>
   <p:sldIdLst>
-    <p:sldId id="257" r:id="rId2"/>
-    <p:sldId id="258" r:id="rId3"/>
-    <p:sldId id="259" r:id="rId4"/>
-    <p:sldId id="260" r:id="rId5"/>
-    <p:sldId id="261" r:id="rId6"/>
-    <p:sldId id="262" r:id="rId7"/>
-    <p:sldId id="263" r:id="rId8"/>
+    <p:sldId id="391" r:id="rId2"/>
+    <p:sldId id="392" r:id="rId3"/>
+    <p:sldId id="393" r:id="rId4"/>
+    <p:sldId id="394" r:id="rId5"/>
+    <p:sldId id="395" r:id="rId6"/>
+    <p:sldId id="396" r:id="rId7"/>
+    <p:sldId id="397" r:id="rId8"/>
+    <p:sldId id="398" r:id="rId9"/>
+    <p:sldId id="399" r:id="rId10"/>
   </p:sldIdLst>
-  <p:sldSz cx="9144000" cy="6858000" type="screen4x3"/>
+  <p:sldSz cx="12192000" cy="6858000"/>
   <p:notesSz cx="6858000" cy="9144000"/>
   <p:defaultTextStyle>
     <a:defPPr>
-      <a:defRPr lang="en-US"/>
+      <a:defRPr lang="vi-VN"/>
     </a:defPPr>
     <a:lvl1pPr marL="0" algn="l" defTabSz="914400" rtl="0" eaLnBrk="1" latinLnBrk="0" hangingPunct="1">
       <a:defRPr sz="1800" kern="1200">
@@ -110,6 +112,11 @@
       </a:defRPr>
     </a:lvl9pPr>
   </p:defaultTextStyle>
+  <p:extLst>
+    <p:ext uri="{EFAFB233-063F-42B5-8137-9DF3F51BA10A}">
+      <p15:sldGuideLst xmlns:p15="http://schemas.microsoft.com/office/powerpoint/2012/main"/>
+    </p:ext>
+  </p:extLst>
 </p:presentation>
 </file>
 
@@ -142,8 +149,8 @@
         </p:nvSpPr>
         <p:spPr>
           <a:xfrm>
-            <a:off x="685800" y="2130425"/>
-            <a:ext cx="7772400" cy="1470025"/>
+            <a:off x="914400" y="2130428"/>
+            <a:ext cx="10363200" cy="1470025"/>
           </a:xfrm>
         </p:spPr>
         <p:txBody>
@@ -151,7 +158,7 @@
           <a:lstStyle/>
           <a:p>
             <a:r>
-              <a:rPr lang="en-US" altLang="zh-TW" smtClean="0"/>
+              <a:rPr lang="en-US" altLang="zh-TW"/>
               <a:t>Click to edit Master title style</a:t>
             </a:r>
             <a:endParaRPr lang="zh-TW" altLang="en-US"/>
@@ -170,8 +177,8 @@
         </p:nvSpPr>
         <p:spPr>
           <a:xfrm>
-            <a:off x="1371600" y="3886200"/>
-            <a:ext cx="6400800" cy="1752600"/>
+            <a:off x="1828800" y="3886200"/>
+            <a:ext cx="8534400" cy="1752600"/>
           </a:xfrm>
         </p:spPr>
         <p:txBody>
@@ -187,7 +194,7 @@
                 </a:solidFill>
               </a:defRPr>
             </a:lvl1pPr>
-            <a:lvl2pPr marL="457200" indent="0" algn="ctr">
+            <a:lvl2pPr marL="609585" indent="0" algn="ctr">
               <a:buNone/>
               <a:defRPr>
                 <a:solidFill>
@@ -197,7 +204,7 @@
                 </a:solidFill>
               </a:defRPr>
             </a:lvl2pPr>
-            <a:lvl3pPr marL="914400" indent="0" algn="ctr">
+            <a:lvl3pPr marL="1219170" indent="0" algn="ctr">
               <a:buNone/>
               <a:defRPr>
                 <a:solidFill>
@@ -207,7 +214,7 @@
                 </a:solidFill>
               </a:defRPr>
             </a:lvl3pPr>
-            <a:lvl4pPr marL="1371600" indent="0" algn="ctr">
+            <a:lvl4pPr marL="1828754" indent="0" algn="ctr">
               <a:buNone/>
               <a:defRPr>
                 <a:solidFill>
@@ -217,7 +224,7 @@
                 </a:solidFill>
               </a:defRPr>
             </a:lvl4pPr>
-            <a:lvl5pPr marL="1828800" indent="0" algn="ctr">
+            <a:lvl5pPr marL="2438339" indent="0" algn="ctr">
               <a:buNone/>
               <a:defRPr>
                 <a:solidFill>
@@ -227,7 +234,7 @@
                 </a:solidFill>
               </a:defRPr>
             </a:lvl5pPr>
-            <a:lvl6pPr marL="2286000" indent="0" algn="ctr">
+            <a:lvl6pPr marL="3047924" indent="0" algn="ctr">
               <a:buNone/>
               <a:defRPr>
                 <a:solidFill>
@@ -237,7 +244,7 @@
                 </a:solidFill>
               </a:defRPr>
             </a:lvl6pPr>
-            <a:lvl7pPr marL="2743200" indent="0" algn="ctr">
+            <a:lvl7pPr marL="3657509" indent="0" algn="ctr">
               <a:buNone/>
               <a:defRPr>
                 <a:solidFill>
@@ -247,7 +254,7 @@
                 </a:solidFill>
               </a:defRPr>
             </a:lvl7pPr>
-            <a:lvl8pPr marL="3200400" indent="0" algn="ctr">
+            <a:lvl8pPr marL="4267093" indent="0" algn="ctr">
               <a:buNone/>
               <a:defRPr>
                 <a:solidFill>
@@ -257,7 +264,7 @@
                 </a:solidFill>
               </a:defRPr>
             </a:lvl8pPr>
-            <a:lvl9pPr marL="3657600" indent="0" algn="ctr">
+            <a:lvl9pPr marL="4876678" indent="0" algn="ctr">
               <a:buNone/>
               <a:defRPr>
                 <a:solidFill>
@@ -270,7 +277,7 @@
           </a:lstStyle>
           <a:p>
             <a:r>
-              <a:rPr lang="en-US" altLang="zh-TW" smtClean="0"/>
+              <a:rPr lang="en-US" altLang="zh-TW"/>
               <a:t>Click to edit Master subtitle style</a:t>
             </a:r>
             <a:endParaRPr lang="zh-TW" altLang="en-US"/>
@@ -292,9 +299,9 @@
           <a:bodyPr/>
           <a:lstStyle/>
           <a:p>
-            <a:fld id="{187F21F5-01BD-4ED2-8910-8626478F30B0}" type="datetimeFigureOut">
+            <a:fld id="{1C488704-7058-4526-95CD-2A163221AB6F}" type="datetimeFigureOut">
               <a:rPr lang="en-US" smtClean="0"/>
-              <a:t>6/22/2019</a:t>
+              <a:t>2/7/2025</a:t>
             </a:fld>
             <a:endParaRPr lang="en-US"/>
           </a:p>
@@ -334,7 +341,7 @@
           <a:bodyPr/>
           <a:lstStyle/>
           <a:p>
-            <a:fld id="{5A87A736-E95A-4A97-916E-DEEC45A466E6}" type="slidenum">
+            <a:fld id="{DC3A5D6F-BA08-4060-B078-EDC13354B14A}" type="slidenum">
               <a:rPr lang="en-US" smtClean="0"/>
               <a:t>‹#›</a:t>
             </a:fld>
@@ -343,6 +350,11 @@
         </p:txBody>
       </p:sp>
     </p:spTree>
+    <p:extLst>
+      <p:ext uri="{BB962C8B-B14F-4D97-AF65-F5344CB8AC3E}">
+        <p14:creationId xmlns:p14="http://schemas.microsoft.com/office/powerpoint/2010/main" val="3009613296"/>
+      </p:ext>
+    </p:extLst>
   </p:cSld>
   <p:clrMapOvr>
     <a:masterClrMapping/>
@@ -383,7 +395,7 @@
           <a:lstStyle/>
           <a:p>
             <a:r>
-              <a:rPr lang="en-US" altLang="zh-TW" smtClean="0"/>
+              <a:rPr lang="en-US" altLang="zh-TW"/>
               <a:t>Click to edit Master title style</a:t>
             </a:r>
             <a:endParaRPr lang="zh-TW" altLang="en-US"/>
@@ -407,35 +419,35 @@
           <a:p>
             <a:pPr lvl="0"/>
             <a:r>
-              <a:rPr lang="en-US" altLang="zh-TW" smtClean="0"/>
+              <a:rPr lang="en-US" altLang="zh-TW"/>
               <a:t>Click to edit Master text styles</a:t>
             </a:r>
           </a:p>
           <a:p>
             <a:pPr lvl="1"/>
             <a:r>
-              <a:rPr lang="en-US" altLang="zh-TW" smtClean="0"/>
+              <a:rPr lang="en-US" altLang="zh-TW"/>
               <a:t>Second level</a:t>
             </a:r>
           </a:p>
           <a:p>
             <a:pPr lvl="2"/>
             <a:r>
-              <a:rPr lang="en-US" altLang="zh-TW" smtClean="0"/>
+              <a:rPr lang="en-US" altLang="zh-TW"/>
               <a:t>Third level</a:t>
             </a:r>
           </a:p>
           <a:p>
             <a:pPr lvl="3"/>
             <a:r>
-              <a:rPr lang="en-US" altLang="zh-TW" smtClean="0"/>
+              <a:rPr lang="en-US" altLang="zh-TW"/>
               <a:t>Fourth level</a:t>
             </a:r>
           </a:p>
           <a:p>
             <a:pPr lvl="4"/>
             <a:r>
-              <a:rPr lang="en-US" altLang="zh-TW" smtClean="0"/>
+              <a:rPr lang="en-US" altLang="zh-TW"/>
               <a:t>Fifth level</a:t>
             </a:r>
             <a:endParaRPr lang="zh-TW" altLang="en-US"/>
@@ -457,9 +469,9 @@
           <a:bodyPr/>
           <a:lstStyle/>
           <a:p>
-            <a:fld id="{187F21F5-01BD-4ED2-8910-8626478F30B0}" type="datetimeFigureOut">
+            <a:fld id="{1C488704-7058-4526-95CD-2A163221AB6F}" type="datetimeFigureOut">
               <a:rPr lang="en-US" smtClean="0"/>
-              <a:t>6/22/2019</a:t>
+              <a:t>2/7/2025</a:t>
             </a:fld>
             <a:endParaRPr lang="en-US"/>
           </a:p>
@@ -499,7 +511,7 @@
           <a:bodyPr/>
           <a:lstStyle/>
           <a:p>
-            <a:fld id="{5A87A736-E95A-4A97-916E-DEEC45A466E6}" type="slidenum">
+            <a:fld id="{DC3A5D6F-BA08-4060-B078-EDC13354B14A}" type="slidenum">
               <a:rPr lang="en-US" smtClean="0"/>
               <a:t>‹#›</a:t>
             </a:fld>
@@ -508,6 +520,11 @@
         </p:txBody>
       </p:sp>
     </p:spTree>
+    <p:extLst>
+      <p:ext uri="{BB962C8B-B14F-4D97-AF65-F5344CB8AC3E}">
+        <p14:creationId xmlns:p14="http://schemas.microsoft.com/office/powerpoint/2010/main" val="1695418020"/>
+      </p:ext>
+    </p:extLst>
   </p:cSld>
   <p:clrMapOvr>
     <a:masterClrMapping/>
@@ -544,8 +561,8 @@
         </p:nvSpPr>
         <p:spPr>
           <a:xfrm>
-            <a:off x="6629400" y="274638"/>
-            <a:ext cx="2057400" cy="5851525"/>
+            <a:off x="8839200" y="274639"/>
+            <a:ext cx="2743200" cy="5851525"/>
           </a:xfrm>
         </p:spPr>
         <p:txBody>
@@ -553,7 +570,7 @@
           <a:lstStyle/>
           <a:p>
             <a:r>
-              <a:rPr lang="en-US" altLang="zh-TW" smtClean="0"/>
+              <a:rPr lang="en-US" altLang="zh-TW"/>
               <a:t>Click to edit Master title style</a:t>
             </a:r>
             <a:endParaRPr lang="zh-TW" altLang="en-US"/>
@@ -572,8 +589,8 @@
         </p:nvSpPr>
         <p:spPr>
           <a:xfrm>
-            <a:off x="457200" y="274638"/>
-            <a:ext cx="6019800" cy="5851525"/>
+            <a:off x="609600" y="274639"/>
+            <a:ext cx="8026400" cy="5851525"/>
           </a:xfrm>
         </p:spPr>
         <p:txBody>
@@ -582,35 +599,35 @@
           <a:p>
             <a:pPr lvl="0"/>
             <a:r>
-              <a:rPr lang="en-US" altLang="zh-TW" smtClean="0"/>
+              <a:rPr lang="en-US" altLang="zh-TW"/>
               <a:t>Click to edit Master text styles</a:t>
             </a:r>
           </a:p>
           <a:p>
             <a:pPr lvl="1"/>
             <a:r>
-              <a:rPr lang="en-US" altLang="zh-TW" smtClean="0"/>
+              <a:rPr lang="en-US" altLang="zh-TW"/>
               <a:t>Second level</a:t>
             </a:r>
           </a:p>
           <a:p>
             <a:pPr lvl="2"/>
             <a:r>
-              <a:rPr lang="en-US" altLang="zh-TW" smtClean="0"/>
+              <a:rPr lang="en-US" altLang="zh-TW"/>
               <a:t>Third level</a:t>
             </a:r>
           </a:p>
           <a:p>
             <a:pPr lvl="3"/>
             <a:r>
-              <a:rPr lang="en-US" altLang="zh-TW" smtClean="0"/>
+              <a:rPr lang="en-US" altLang="zh-TW"/>
               <a:t>Fourth level</a:t>
             </a:r>
           </a:p>
           <a:p>
             <a:pPr lvl="4"/>
             <a:r>
-              <a:rPr lang="en-US" altLang="zh-TW" smtClean="0"/>
+              <a:rPr lang="en-US" altLang="zh-TW"/>
               <a:t>Fifth level</a:t>
             </a:r>
             <a:endParaRPr lang="zh-TW" altLang="en-US"/>
@@ -632,9 +649,9 @@
           <a:bodyPr/>
           <a:lstStyle/>
           <a:p>
-            <a:fld id="{187F21F5-01BD-4ED2-8910-8626478F30B0}" type="datetimeFigureOut">
+            <a:fld id="{1C488704-7058-4526-95CD-2A163221AB6F}" type="datetimeFigureOut">
               <a:rPr lang="en-US" smtClean="0"/>
-              <a:t>6/22/2019</a:t>
+              <a:t>2/7/2025</a:t>
             </a:fld>
             <a:endParaRPr lang="en-US"/>
           </a:p>
@@ -674,7 +691,7 @@
           <a:bodyPr/>
           <a:lstStyle/>
           <a:p>
-            <a:fld id="{5A87A736-E95A-4A97-916E-DEEC45A466E6}" type="slidenum">
+            <a:fld id="{DC3A5D6F-BA08-4060-B078-EDC13354B14A}" type="slidenum">
               <a:rPr lang="en-US" smtClean="0"/>
               <a:t>‹#›</a:t>
             </a:fld>
@@ -683,6 +700,11 @@
         </p:txBody>
       </p:sp>
     </p:spTree>
+    <p:extLst>
+      <p:ext uri="{BB962C8B-B14F-4D97-AF65-F5344CB8AC3E}">
+        <p14:creationId xmlns:p14="http://schemas.microsoft.com/office/powerpoint/2010/main" val="1419624945"/>
+      </p:ext>
+    </p:extLst>
   </p:cSld>
   <p:clrMapOvr>
     <a:masterClrMapping/>
@@ -723,7 +745,7 @@
           <a:lstStyle/>
           <a:p>
             <a:r>
-              <a:rPr lang="en-US" altLang="zh-TW" smtClean="0"/>
+              <a:rPr lang="en-US" altLang="zh-TW"/>
               <a:t>Click to edit Master title style</a:t>
             </a:r>
             <a:endParaRPr lang="zh-TW" altLang="en-US"/>
@@ -747,35 +769,35 @@
           <a:p>
             <a:pPr lvl="0"/>
             <a:r>
-              <a:rPr lang="en-US" altLang="zh-TW" smtClean="0"/>
+              <a:rPr lang="en-US" altLang="zh-TW"/>
               <a:t>Click to edit Master text styles</a:t>
             </a:r>
           </a:p>
           <a:p>
             <a:pPr lvl="1"/>
             <a:r>
-              <a:rPr lang="en-US" altLang="zh-TW" smtClean="0"/>
+              <a:rPr lang="en-US" altLang="zh-TW"/>
               <a:t>Second level</a:t>
             </a:r>
           </a:p>
           <a:p>
             <a:pPr lvl="2"/>
             <a:r>
-              <a:rPr lang="en-US" altLang="zh-TW" smtClean="0"/>
+              <a:rPr lang="en-US" altLang="zh-TW"/>
               <a:t>Third level</a:t>
             </a:r>
           </a:p>
           <a:p>
             <a:pPr lvl="3"/>
             <a:r>
-              <a:rPr lang="en-US" altLang="zh-TW" smtClean="0"/>
+              <a:rPr lang="en-US" altLang="zh-TW"/>
               <a:t>Fourth level</a:t>
             </a:r>
           </a:p>
           <a:p>
             <a:pPr lvl="4"/>
             <a:r>
-              <a:rPr lang="en-US" altLang="zh-TW" smtClean="0"/>
+              <a:rPr lang="en-US" altLang="zh-TW"/>
               <a:t>Fifth level</a:t>
             </a:r>
             <a:endParaRPr lang="zh-TW" altLang="en-US"/>
@@ -797,9 +819,9 @@
           <a:bodyPr/>
           <a:lstStyle/>
           <a:p>
-            <a:fld id="{187F21F5-01BD-4ED2-8910-8626478F30B0}" type="datetimeFigureOut">
+            <a:fld id="{1C488704-7058-4526-95CD-2A163221AB6F}" type="datetimeFigureOut">
               <a:rPr lang="en-US" smtClean="0"/>
-              <a:t>6/22/2019</a:t>
+              <a:t>2/7/2025</a:t>
             </a:fld>
             <a:endParaRPr lang="en-US"/>
           </a:p>
@@ -839,7 +861,7 @@
           <a:bodyPr/>
           <a:lstStyle/>
           <a:p>
-            <a:fld id="{5A87A736-E95A-4A97-916E-DEEC45A466E6}" type="slidenum">
+            <a:fld id="{DC3A5D6F-BA08-4060-B078-EDC13354B14A}" type="slidenum">
               <a:rPr lang="en-US" smtClean="0"/>
               <a:t>‹#›</a:t>
             </a:fld>
@@ -848,6 +870,11 @@
         </p:txBody>
       </p:sp>
     </p:spTree>
+    <p:extLst>
+      <p:ext uri="{BB962C8B-B14F-4D97-AF65-F5344CB8AC3E}">
+        <p14:creationId xmlns:p14="http://schemas.microsoft.com/office/powerpoint/2010/main" val="568337030"/>
+      </p:ext>
+    </p:extLst>
   </p:cSld>
   <p:clrMapOvr>
     <a:masterClrMapping/>
@@ -884,20 +911,20 @@
         </p:nvSpPr>
         <p:spPr>
           <a:xfrm>
-            <a:off x="722313" y="4406900"/>
-            <a:ext cx="7772400" cy="1362075"/>
+            <a:off x="963084" y="4406901"/>
+            <a:ext cx="10363200" cy="1362075"/>
           </a:xfrm>
         </p:spPr>
         <p:txBody>
           <a:bodyPr anchor="t"/>
           <a:lstStyle>
             <a:lvl1pPr algn="l">
-              <a:defRPr sz="4000" b="1" cap="all"/>
+              <a:defRPr sz="5333" b="1" cap="all"/>
             </a:lvl1pPr>
           </a:lstStyle>
           <a:p>
             <a:r>
-              <a:rPr lang="en-US" altLang="zh-TW" smtClean="0"/>
+              <a:rPr lang="en-US" altLang="zh-TW"/>
               <a:t>Click to edit Master title style</a:t>
             </a:r>
             <a:endParaRPr lang="zh-TW" altLang="en-US"/>
@@ -916,8 +943,8 @@
         </p:nvSpPr>
         <p:spPr>
           <a:xfrm>
-            <a:off x="722313" y="2906713"/>
-            <a:ext cx="7772400" cy="1500187"/>
+            <a:off x="963084" y="2906713"/>
+            <a:ext cx="10363200" cy="1500187"/>
           </a:xfrm>
         </p:spPr>
         <p:txBody>
@@ -925,7 +952,7 @@
           <a:lstStyle>
             <a:lvl1pPr marL="0" indent="0">
               <a:buNone/>
-              <a:defRPr sz="2000">
+              <a:defRPr sz="2667">
                 <a:solidFill>
                   <a:schemeClr val="tx1">
                     <a:tint val="75000"/>
@@ -933,9 +960,9 @@
                 </a:solidFill>
               </a:defRPr>
             </a:lvl1pPr>
-            <a:lvl2pPr marL="457200" indent="0">
-              <a:buNone/>
-              <a:defRPr sz="1800">
+            <a:lvl2pPr marL="609585" indent="0">
+              <a:buNone/>
+              <a:defRPr sz="2400">
                 <a:solidFill>
                   <a:schemeClr val="tx1">
                     <a:tint val="75000"/>
@@ -943,9 +970,9 @@
                 </a:solidFill>
               </a:defRPr>
             </a:lvl2pPr>
-            <a:lvl3pPr marL="914400" indent="0">
-              <a:buNone/>
-              <a:defRPr sz="1600">
+            <a:lvl3pPr marL="1219170" indent="0">
+              <a:buNone/>
+              <a:defRPr sz="2133">
                 <a:solidFill>
                   <a:schemeClr val="tx1">
                     <a:tint val="75000"/>
@@ -953,9 +980,9 @@
                 </a:solidFill>
               </a:defRPr>
             </a:lvl3pPr>
-            <a:lvl4pPr marL="1371600" indent="0">
-              <a:buNone/>
-              <a:defRPr sz="1400">
+            <a:lvl4pPr marL="1828754" indent="0">
+              <a:buNone/>
+              <a:defRPr sz="1867">
                 <a:solidFill>
                   <a:schemeClr val="tx1">
                     <a:tint val="75000"/>
@@ -963,9 +990,9 @@
                 </a:solidFill>
               </a:defRPr>
             </a:lvl4pPr>
-            <a:lvl5pPr marL="1828800" indent="0">
-              <a:buNone/>
-              <a:defRPr sz="1400">
+            <a:lvl5pPr marL="2438339" indent="0">
+              <a:buNone/>
+              <a:defRPr sz="1867">
                 <a:solidFill>
                   <a:schemeClr val="tx1">
                     <a:tint val="75000"/>
@@ -973,9 +1000,9 @@
                 </a:solidFill>
               </a:defRPr>
             </a:lvl5pPr>
-            <a:lvl6pPr marL="2286000" indent="0">
-              <a:buNone/>
-              <a:defRPr sz="1400">
+            <a:lvl6pPr marL="3047924" indent="0">
+              <a:buNone/>
+              <a:defRPr sz="1867">
                 <a:solidFill>
                   <a:schemeClr val="tx1">
                     <a:tint val="75000"/>
@@ -983,9 +1010,9 @@
                 </a:solidFill>
               </a:defRPr>
             </a:lvl6pPr>
-            <a:lvl7pPr marL="2743200" indent="0">
-              <a:buNone/>
-              <a:defRPr sz="1400">
+            <a:lvl7pPr marL="3657509" indent="0">
+              <a:buNone/>
+              <a:defRPr sz="1867">
                 <a:solidFill>
                   <a:schemeClr val="tx1">
                     <a:tint val="75000"/>
@@ -993,9 +1020,9 @@
                 </a:solidFill>
               </a:defRPr>
             </a:lvl7pPr>
-            <a:lvl8pPr marL="3200400" indent="0">
-              <a:buNone/>
-              <a:defRPr sz="1400">
+            <a:lvl8pPr marL="4267093" indent="0">
+              <a:buNone/>
+              <a:defRPr sz="1867">
                 <a:solidFill>
                   <a:schemeClr val="tx1">
                     <a:tint val="75000"/>
@@ -1003,9 +1030,9 @@
                 </a:solidFill>
               </a:defRPr>
             </a:lvl8pPr>
-            <a:lvl9pPr marL="3657600" indent="0">
-              <a:buNone/>
-              <a:defRPr sz="1400">
+            <a:lvl9pPr marL="4876678" indent="0">
+              <a:buNone/>
+              <a:defRPr sz="1867">
                 <a:solidFill>
                   <a:schemeClr val="tx1">
                     <a:tint val="75000"/>
@@ -1017,7 +1044,7 @@
           <a:p>
             <a:pPr lvl="0"/>
             <a:r>
-              <a:rPr lang="en-US" altLang="zh-TW" smtClean="0"/>
+              <a:rPr lang="en-US" altLang="zh-TW"/>
               <a:t>Click to edit Master text styles</a:t>
             </a:r>
           </a:p>
@@ -1038,9 +1065,9 @@
           <a:bodyPr/>
           <a:lstStyle/>
           <a:p>
-            <a:fld id="{187F21F5-01BD-4ED2-8910-8626478F30B0}" type="datetimeFigureOut">
+            <a:fld id="{1C488704-7058-4526-95CD-2A163221AB6F}" type="datetimeFigureOut">
               <a:rPr lang="en-US" smtClean="0"/>
-              <a:t>6/22/2019</a:t>
+              <a:t>2/7/2025</a:t>
             </a:fld>
             <a:endParaRPr lang="en-US"/>
           </a:p>
@@ -1080,7 +1107,7 @@
           <a:bodyPr/>
           <a:lstStyle/>
           <a:p>
-            <a:fld id="{5A87A736-E95A-4A97-916E-DEEC45A466E6}" type="slidenum">
+            <a:fld id="{DC3A5D6F-BA08-4060-B078-EDC13354B14A}" type="slidenum">
               <a:rPr lang="en-US" smtClean="0"/>
               <a:t>‹#›</a:t>
             </a:fld>
@@ -1089,6 +1116,11 @@
         </p:txBody>
       </p:sp>
     </p:spTree>
+    <p:extLst>
+      <p:ext uri="{BB962C8B-B14F-4D97-AF65-F5344CB8AC3E}">
+        <p14:creationId xmlns:p14="http://schemas.microsoft.com/office/powerpoint/2010/main" val="1909794818"/>
+      </p:ext>
+    </p:extLst>
   </p:cSld>
   <p:clrMapOvr>
     <a:masterClrMapping/>
@@ -1129,7 +1161,7 @@
           <a:lstStyle/>
           <a:p>
             <a:r>
-              <a:rPr lang="en-US" altLang="zh-TW" smtClean="0"/>
+              <a:rPr lang="en-US" altLang="zh-TW"/>
               <a:t>Click to edit Master title style</a:t>
             </a:r>
             <a:endParaRPr lang="zh-TW" altLang="en-US"/>
@@ -1148,73 +1180,73 @@
         </p:nvSpPr>
         <p:spPr>
           <a:xfrm>
-            <a:off x="457200" y="1600200"/>
-            <a:ext cx="4038600" cy="4525963"/>
+            <a:off x="609600" y="1600201"/>
+            <a:ext cx="5384800" cy="4525963"/>
           </a:xfrm>
         </p:spPr>
         <p:txBody>
           <a:bodyPr/>
           <a:lstStyle>
             <a:lvl1pPr>
-              <a:defRPr sz="2800"/>
+              <a:defRPr sz="3733"/>
             </a:lvl1pPr>
             <a:lvl2pPr>
-              <a:defRPr sz="2400"/>
+              <a:defRPr sz="3200"/>
             </a:lvl2pPr>
             <a:lvl3pPr>
-              <a:defRPr sz="2000"/>
+              <a:defRPr sz="2667"/>
             </a:lvl3pPr>
             <a:lvl4pPr>
-              <a:defRPr sz="1800"/>
+              <a:defRPr sz="2400"/>
             </a:lvl4pPr>
             <a:lvl5pPr>
-              <a:defRPr sz="1800"/>
+              <a:defRPr sz="2400"/>
             </a:lvl5pPr>
             <a:lvl6pPr>
-              <a:defRPr sz="1800"/>
+              <a:defRPr sz="2400"/>
             </a:lvl6pPr>
             <a:lvl7pPr>
-              <a:defRPr sz="1800"/>
+              <a:defRPr sz="2400"/>
             </a:lvl7pPr>
             <a:lvl8pPr>
-              <a:defRPr sz="1800"/>
+              <a:defRPr sz="2400"/>
             </a:lvl8pPr>
             <a:lvl9pPr>
-              <a:defRPr sz="1800"/>
+              <a:defRPr sz="2400"/>
             </a:lvl9pPr>
           </a:lstStyle>
           <a:p>
             <a:pPr lvl="0"/>
             <a:r>
-              <a:rPr lang="en-US" altLang="zh-TW" smtClean="0"/>
+              <a:rPr lang="en-US" altLang="zh-TW"/>
               <a:t>Click to edit Master text styles</a:t>
             </a:r>
           </a:p>
           <a:p>
             <a:pPr lvl="1"/>
             <a:r>
-              <a:rPr lang="en-US" altLang="zh-TW" smtClean="0"/>
+              <a:rPr lang="en-US" altLang="zh-TW"/>
               <a:t>Second level</a:t>
             </a:r>
           </a:p>
           <a:p>
             <a:pPr lvl="2"/>
             <a:r>
-              <a:rPr lang="en-US" altLang="zh-TW" smtClean="0"/>
+              <a:rPr lang="en-US" altLang="zh-TW"/>
               <a:t>Third level</a:t>
             </a:r>
           </a:p>
           <a:p>
             <a:pPr lvl="3"/>
             <a:r>
-              <a:rPr lang="en-US" altLang="zh-TW" smtClean="0"/>
+              <a:rPr lang="en-US" altLang="zh-TW"/>
               <a:t>Fourth level</a:t>
             </a:r>
           </a:p>
           <a:p>
             <a:pPr lvl="4"/>
             <a:r>
-              <a:rPr lang="en-US" altLang="zh-TW" smtClean="0"/>
+              <a:rPr lang="en-US" altLang="zh-TW"/>
               <a:t>Fifth level</a:t>
             </a:r>
             <a:endParaRPr lang="zh-TW" altLang="en-US"/>
@@ -1233,73 +1265,73 @@
         </p:nvSpPr>
         <p:spPr>
           <a:xfrm>
-            <a:off x="4648200" y="1600200"/>
-            <a:ext cx="4038600" cy="4525963"/>
+            <a:off x="6197600" y="1600201"/>
+            <a:ext cx="5384800" cy="4525963"/>
           </a:xfrm>
         </p:spPr>
         <p:txBody>
           <a:bodyPr/>
           <a:lstStyle>
             <a:lvl1pPr>
-              <a:defRPr sz="2800"/>
+              <a:defRPr sz="3733"/>
             </a:lvl1pPr>
             <a:lvl2pPr>
-              <a:defRPr sz="2400"/>
+              <a:defRPr sz="3200"/>
             </a:lvl2pPr>
             <a:lvl3pPr>
-              <a:defRPr sz="2000"/>
+              <a:defRPr sz="2667"/>
             </a:lvl3pPr>
             <a:lvl4pPr>
-              <a:defRPr sz="1800"/>
+              <a:defRPr sz="2400"/>
             </a:lvl4pPr>
             <a:lvl5pPr>
-              <a:defRPr sz="1800"/>
+              <a:defRPr sz="2400"/>
             </a:lvl5pPr>
             <a:lvl6pPr>
-              <a:defRPr sz="1800"/>
+              <a:defRPr sz="2400"/>
             </a:lvl6pPr>
             <a:lvl7pPr>
-              <a:defRPr sz="1800"/>
+              <a:defRPr sz="2400"/>
             </a:lvl7pPr>
             <a:lvl8pPr>
-              <a:defRPr sz="1800"/>
+              <a:defRPr sz="2400"/>
             </a:lvl8pPr>
             <a:lvl9pPr>
-              <a:defRPr sz="1800"/>
+              <a:defRPr sz="2400"/>
             </a:lvl9pPr>
           </a:lstStyle>
           <a:p>
             <a:pPr lvl="0"/>
             <a:r>
-              <a:rPr lang="en-US" altLang="zh-TW" smtClean="0"/>
+              <a:rPr lang="en-US" altLang="zh-TW"/>
               <a:t>Click to edit Master text styles</a:t>
             </a:r>
           </a:p>
           <a:p>
             <a:pPr lvl="1"/>
             <a:r>
-              <a:rPr lang="en-US" altLang="zh-TW" smtClean="0"/>
+              <a:rPr lang="en-US" altLang="zh-TW"/>
               <a:t>Second level</a:t>
             </a:r>
           </a:p>
           <a:p>
             <a:pPr lvl="2"/>
             <a:r>
-              <a:rPr lang="en-US" altLang="zh-TW" smtClean="0"/>
+              <a:rPr lang="en-US" altLang="zh-TW"/>
               <a:t>Third level</a:t>
             </a:r>
           </a:p>
           <a:p>
             <a:pPr lvl="3"/>
             <a:r>
-              <a:rPr lang="en-US" altLang="zh-TW" smtClean="0"/>
+              <a:rPr lang="en-US" altLang="zh-TW"/>
               <a:t>Fourth level</a:t>
             </a:r>
           </a:p>
           <a:p>
             <a:pPr lvl="4"/>
             <a:r>
-              <a:rPr lang="en-US" altLang="zh-TW" smtClean="0"/>
+              <a:rPr lang="en-US" altLang="zh-TW"/>
               <a:t>Fifth level</a:t>
             </a:r>
             <a:endParaRPr lang="zh-TW" altLang="en-US"/>
@@ -1321,9 +1353,9 @@
           <a:bodyPr/>
           <a:lstStyle/>
           <a:p>
-            <a:fld id="{187F21F5-01BD-4ED2-8910-8626478F30B0}" type="datetimeFigureOut">
+            <a:fld id="{1C488704-7058-4526-95CD-2A163221AB6F}" type="datetimeFigureOut">
               <a:rPr lang="en-US" smtClean="0"/>
-              <a:t>6/22/2019</a:t>
+              <a:t>2/7/2025</a:t>
             </a:fld>
             <a:endParaRPr lang="en-US"/>
           </a:p>
@@ -1363,7 +1395,7 @@
           <a:bodyPr/>
           <a:lstStyle/>
           <a:p>
-            <a:fld id="{5A87A736-E95A-4A97-916E-DEEC45A466E6}" type="slidenum">
+            <a:fld id="{DC3A5D6F-BA08-4060-B078-EDC13354B14A}" type="slidenum">
               <a:rPr lang="en-US" smtClean="0"/>
               <a:t>‹#›</a:t>
             </a:fld>
@@ -1372,6 +1404,11 @@
         </p:txBody>
       </p:sp>
     </p:spTree>
+    <p:extLst>
+      <p:ext uri="{BB962C8B-B14F-4D97-AF65-F5344CB8AC3E}">
+        <p14:creationId xmlns:p14="http://schemas.microsoft.com/office/powerpoint/2010/main" val="1080896849"/>
+      </p:ext>
+    </p:extLst>
   </p:cSld>
   <p:clrMapOvr>
     <a:masterClrMapping/>
@@ -1416,7 +1453,7 @@
           </a:lstStyle>
           <a:p>
             <a:r>
-              <a:rPr lang="en-US" altLang="zh-TW" smtClean="0"/>
+              <a:rPr lang="en-US" altLang="zh-TW"/>
               <a:t>Click to edit Master title style</a:t>
             </a:r>
             <a:endParaRPr lang="zh-TW" altLang="en-US"/>
@@ -1435,8 +1472,8 @@
         </p:nvSpPr>
         <p:spPr>
           <a:xfrm>
-            <a:off x="457200" y="1535113"/>
-            <a:ext cx="4040188" cy="639762"/>
+            <a:off x="609600" y="1535113"/>
+            <a:ext cx="5386917" cy="639763"/>
           </a:xfrm>
         </p:spPr>
         <p:txBody>
@@ -1444,45 +1481,45 @@
           <a:lstStyle>
             <a:lvl1pPr marL="0" indent="0">
               <a:buNone/>
+              <a:defRPr sz="3200" b="1"/>
+            </a:lvl1pPr>
+            <a:lvl2pPr marL="609585" indent="0">
+              <a:buNone/>
+              <a:defRPr sz="2667" b="1"/>
+            </a:lvl2pPr>
+            <a:lvl3pPr marL="1219170" indent="0">
+              <a:buNone/>
               <a:defRPr sz="2400" b="1"/>
-            </a:lvl1pPr>
-            <a:lvl2pPr marL="457200" indent="0">
-              <a:buNone/>
-              <a:defRPr sz="2000" b="1"/>
-            </a:lvl2pPr>
-            <a:lvl3pPr marL="914400" indent="0">
-              <a:buNone/>
-              <a:defRPr sz="1800" b="1"/>
             </a:lvl3pPr>
-            <a:lvl4pPr marL="1371600" indent="0">
-              <a:buNone/>
-              <a:defRPr sz="1600" b="1"/>
+            <a:lvl4pPr marL="1828754" indent="0">
+              <a:buNone/>
+              <a:defRPr sz="2133" b="1"/>
             </a:lvl4pPr>
-            <a:lvl5pPr marL="1828800" indent="0">
-              <a:buNone/>
-              <a:defRPr sz="1600" b="1"/>
+            <a:lvl5pPr marL="2438339" indent="0">
+              <a:buNone/>
+              <a:defRPr sz="2133" b="1"/>
             </a:lvl5pPr>
-            <a:lvl6pPr marL="2286000" indent="0">
-              <a:buNone/>
-              <a:defRPr sz="1600" b="1"/>
+            <a:lvl6pPr marL="3047924" indent="0">
+              <a:buNone/>
+              <a:defRPr sz="2133" b="1"/>
             </a:lvl6pPr>
-            <a:lvl7pPr marL="2743200" indent="0">
-              <a:buNone/>
-              <a:defRPr sz="1600" b="1"/>
+            <a:lvl7pPr marL="3657509" indent="0">
+              <a:buNone/>
+              <a:defRPr sz="2133" b="1"/>
             </a:lvl7pPr>
-            <a:lvl8pPr marL="3200400" indent="0">
-              <a:buNone/>
-              <a:defRPr sz="1600" b="1"/>
+            <a:lvl8pPr marL="4267093" indent="0">
+              <a:buNone/>
+              <a:defRPr sz="2133" b="1"/>
             </a:lvl8pPr>
-            <a:lvl9pPr marL="3657600" indent="0">
-              <a:buNone/>
-              <a:defRPr sz="1600" b="1"/>
+            <a:lvl9pPr marL="4876678" indent="0">
+              <a:buNone/>
+              <a:defRPr sz="2133" b="1"/>
             </a:lvl9pPr>
           </a:lstStyle>
           <a:p>
             <a:pPr lvl="0"/>
             <a:r>
-              <a:rPr lang="en-US" altLang="zh-TW" smtClean="0"/>
+              <a:rPr lang="en-US" altLang="zh-TW"/>
               <a:t>Click to edit Master text styles</a:t>
             </a:r>
           </a:p>
@@ -1500,73 +1537,73 @@
         </p:nvSpPr>
         <p:spPr>
           <a:xfrm>
-            <a:off x="457200" y="2174875"/>
-            <a:ext cx="4040188" cy="3951288"/>
+            <a:off x="609600" y="2174875"/>
+            <a:ext cx="5386917" cy="3951288"/>
           </a:xfrm>
         </p:spPr>
         <p:txBody>
           <a:bodyPr/>
           <a:lstStyle>
             <a:lvl1pPr>
-              <a:defRPr sz="2400"/>
+              <a:defRPr sz="3200"/>
             </a:lvl1pPr>
             <a:lvl2pPr>
-              <a:defRPr sz="2000"/>
+              <a:defRPr sz="2667"/>
             </a:lvl2pPr>
             <a:lvl3pPr>
-              <a:defRPr sz="1800"/>
+              <a:defRPr sz="2400"/>
             </a:lvl3pPr>
             <a:lvl4pPr>
-              <a:defRPr sz="1600"/>
+              <a:defRPr sz="2133"/>
             </a:lvl4pPr>
             <a:lvl5pPr>
-              <a:defRPr sz="1600"/>
+              <a:defRPr sz="2133"/>
             </a:lvl5pPr>
             <a:lvl6pPr>
-              <a:defRPr sz="1600"/>
+              <a:defRPr sz="2133"/>
             </a:lvl6pPr>
             <a:lvl7pPr>
-              <a:defRPr sz="1600"/>
+              <a:defRPr sz="2133"/>
             </a:lvl7pPr>
             <a:lvl8pPr>
-              <a:defRPr sz="1600"/>
+              <a:defRPr sz="2133"/>
             </a:lvl8pPr>
             <a:lvl9pPr>
-              <a:defRPr sz="1600"/>
+              <a:defRPr sz="2133"/>
             </a:lvl9pPr>
           </a:lstStyle>
           <a:p>
             <a:pPr lvl="0"/>
             <a:r>
-              <a:rPr lang="en-US" altLang="zh-TW" smtClean="0"/>
+              <a:rPr lang="en-US" altLang="zh-TW"/>
               <a:t>Click to edit Master text styles</a:t>
             </a:r>
           </a:p>
           <a:p>
             <a:pPr lvl="1"/>
             <a:r>
-              <a:rPr lang="en-US" altLang="zh-TW" smtClean="0"/>
+              <a:rPr lang="en-US" altLang="zh-TW"/>
               <a:t>Second level</a:t>
             </a:r>
           </a:p>
           <a:p>
             <a:pPr lvl="2"/>
             <a:r>
-              <a:rPr lang="en-US" altLang="zh-TW" smtClean="0"/>
+              <a:rPr lang="en-US" altLang="zh-TW"/>
               <a:t>Third level</a:t>
             </a:r>
           </a:p>
           <a:p>
             <a:pPr lvl="3"/>
             <a:r>
-              <a:rPr lang="en-US" altLang="zh-TW" smtClean="0"/>
+              <a:rPr lang="en-US" altLang="zh-TW"/>
               <a:t>Fourth level</a:t>
             </a:r>
           </a:p>
           <a:p>
             <a:pPr lvl="4"/>
             <a:r>
-              <a:rPr lang="en-US" altLang="zh-TW" smtClean="0"/>
+              <a:rPr lang="en-US" altLang="zh-TW"/>
               <a:t>Fifth level</a:t>
             </a:r>
             <a:endParaRPr lang="zh-TW" altLang="en-US"/>
@@ -1585,8 +1622,8 @@
         </p:nvSpPr>
         <p:spPr>
           <a:xfrm>
-            <a:off x="4645025" y="1535113"/>
-            <a:ext cx="4041775" cy="639762"/>
+            <a:off x="6193372" y="1535113"/>
+            <a:ext cx="5389033" cy="639763"/>
           </a:xfrm>
         </p:spPr>
         <p:txBody>
@@ -1594,45 +1631,45 @@
           <a:lstStyle>
             <a:lvl1pPr marL="0" indent="0">
               <a:buNone/>
+              <a:defRPr sz="3200" b="1"/>
+            </a:lvl1pPr>
+            <a:lvl2pPr marL="609585" indent="0">
+              <a:buNone/>
+              <a:defRPr sz="2667" b="1"/>
+            </a:lvl2pPr>
+            <a:lvl3pPr marL="1219170" indent="0">
+              <a:buNone/>
               <a:defRPr sz="2400" b="1"/>
-            </a:lvl1pPr>
-            <a:lvl2pPr marL="457200" indent="0">
-              <a:buNone/>
-              <a:defRPr sz="2000" b="1"/>
-            </a:lvl2pPr>
-            <a:lvl3pPr marL="914400" indent="0">
-              <a:buNone/>
-              <a:defRPr sz="1800" b="1"/>
             </a:lvl3pPr>
-            <a:lvl4pPr marL="1371600" indent="0">
-              <a:buNone/>
-              <a:defRPr sz="1600" b="1"/>
+            <a:lvl4pPr marL="1828754" indent="0">
+              <a:buNone/>
+              <a:defRPr sz="2133" b="1"/>
             </a:lvl4pPr>
-            <a:lvl5pPr marL="1828800" indent="0">
-              <a:buNone/>
-              <a:defRPr sz="1600" b="1"/>
+            <a:lvl5pPr marL="2438339" indent="0">
+              <a:buNone/>
+              <a:defRPr sz="2133" b="1"/>
             </a:lvl5pPr>
-            <a:lvl6pPr marL="2286000" indent="0">
-              <a:buNone/>
-              <a:defRPr sz="1600" b="1"/>
+            <a:lvl6pPr marL="3047924" indent="0">
+              <a:buNone/>
+              <a:defRPr sz="2133" b="1"/>
             </a:lvl6pPr>
-            <a:lvl7pPr marL="2743200" indent="0">
-              <a:buNone/>
-              <a:defRPr sz="1600" b="1"/>
+            <a:lvl7pPr marL="3657509" indent="0">
+              <a:buNone/>
+              <a:defRPr sz="2133" b="1"/>
             </a:lvl7pPr>
-            <a:lvl8pPr marL="3200400" indent="0">
-              <a:buNone/>
-              <a:defRPr sz="1600" b="1"/>
+            <a:lvl8pPr marL="4267093" indent="0">
+              <a:buNone/>
+              <a:defRPr sz="2133" b="1"/>
             </a:lvl8pPr>
-            <a:lvl9pPr marL="3657600" indent="0">
-              <a:buNone/>
-              <a:defRPr sz="1600" b="1"/>
+            <a:lvl9pPr marL="4876678" indent="0">
+              <a:buNone/>
+              <a:defRPr sz="2133" b="1"/>
             </a:lvl9pPr>
           </a:lstStyle>
           <a:p>
             <a:pPr lvl="0"/>
             <a:r>
-              <a:rPr lang="en-US" altLang="zh-TW" smtClean="0"/>
+              <a:rPr lang="en-US" altLang="zh-TW"/>
               <a:t>Click to edit Master text styles</a:t>
             </a:r>
           </a:p>
@@ -1650,73 +1687,73 @@
         </p:nvSpPr>
         <p:spPr>
           <a:xfrm>
-            <a:off x="4645025" y="2174875"/>
-            <a:ext cx="4041775" cy="3951288"/>
+            <a:off x="6193372" y="2174875"/>
+            <a:ext cx="5389033" cy="3951288"/>
           </a:xfrm>
         </p:spPr>
         <p:txBody>
           <a:bodyPr/>
           <a:lstStyle>
             <a:lvl1pPr>
-              <a:defRPr sz="2400"/>
+              <a:defRPr sz="3200"/>
             </a:lvl1pPr>
             <a:lvl2pPr>
-              <a:defRPr sz="2000"/>
+              <a:defRPr sz="2667"/>
             </a:lvl2pPr>
             <a:lvl3pPr>
-              <a:defRPr sz="1800"/>
+              <a:defRPr sz="2400"/>
             </a:lvl3pPr>
             <a:lvl4pPr>
-              <a:defRPr sz="1600"/>
+              <a:defRPr sz="2133"/>
             </a:lvl4pPr>
             <a:lvl5pPr>
-              <a:defRPr sz="1600"/>
+              <a:defRPr sz="2133"/>
             </a:lvl5pPr>
             <a:lvl6pPr>
-              <a:defRPr sz="1600"/>
+              <a:defRPr sz="2133"/>
             </a:lvl6pPr>
             <a:lvl7pPr>
-              <a:defRPr sz="1600"/>
+              <a:defRPr sz="2133"/>
             </a:lvl7pPr>
             <a:lvl8pPr>
-              <a:defRPr sz="1600"/>
+              <a:defRPr sz="2133"/>
             </a:lvl8pPr>
             <a:lvl9pPr>
-              <a:defRPr sz="1600"/>
+              <a:defRPr sz="2133"/>
             </a:lvl9pPr>
           </a:lstStyle>
           <a:p>
             <a:pPr lvl="0"/>
             <a:r>
-              <a:rPr lang="en-US" altLang="zh-TW" smtClean="0"/>
+              <a:rPr lang="en-US" altLang="zh-TW"/>
               <a:t>Click to edit Master text styles</a:t>
             </a:r>
           </a:p>
           <a:p>
             <a:pPr lvl="1"/>
             <a:r>
-              <a:rPr lang="en-US" altLang="zh-TW" smtClean="0"/>
+              <a:rPr lang="en-US" altLang="zh-TW"/>
               <a:t>Second level</a:t>
             </a:r>
           </a:p>
           <a:p>
             <a:pPr lvl="2"/>
             <a:r>
-              <a:rPr lang="en-US" altLang="zh-TW" smtClean="0"/>
+              <a:rPr lang="en-US" altLang="zh-TW"/>
               <a:t>Third level</a:t>
             </a:r>
           </a:p>
           <a:p>
             <a:pPr lvl="3"/>
             <a:r>
-              <a:rPr lang="en-US" altLang="zh-TW" smtClean="0"/>
+              <a:rPr lang="en-US" altLang="zh-TW"/>
               <a:t>Fourth level</a:t>
             </a:r>
           </a:p>
           <a:p>
             <a:pPr lvl="4"/>
             <a:r>
-              <a:rPr lang="en-US" altLang="zh-TW" smtClean="0"/>
+              <a:rPr lang="en-US" altLang="zh-TW"/>
               <a:t>Fifth level</a:t>
             </a:r>
             <a:endParaRPr lang="zh-TW" altLang="en-US"/>
@@ -1738,9 +1775,9 @@
           <a:bodyPr/>
           <a:lstStyle/>
           <a:p>
-            <a:fld id="{187F21F5-01BD-4ED2-8910-8626478F30B0}" type="datetimeFigureOut">
+            <a:fld id="{1C488704-7058-4526-95CD-2A163221AB6F}" type="datetimeFigureOut">
               <a:rPr lang="en-US" smtClean="0"/>
-              <a:t>6/22/2019</a:t>
+              <a:t>2/7/2025</a:t>
             </a:fld>
             <a:endParaRPr lang="en-US"/>
           </a:p>
@@ -1780,7 +1817,7 @@
           <a:bodyPr/>
           <a:lstStyle/>
           <a:p>
-            <a:fld id="{5A87A736-E95A-4A97-916E-DEEC45A466E6}" type="slidenum">
+            <a:fld id="{DC3A5D6F-BA08-4060-B078-EDC13354B14A}" type="slidenum">
               <a:rPr lang="en-US" smtClean="0"/>
               <a:t>‹#›</a:t>
             </a:fld>
@@ -1789,6 +1826,11 @@
         </p:txBody>
       </p:sp>
     </p:spTree>
+    <p:extLst>
+      <p:ext uri="{BB962C8B-B14F-4D97-AF65-F5344CB8AC3E}">
+        <p14:creationId xmlns:p14="http://schemas.microsoft.com/office/powerpoint/2010/main" val="4182221447"/>
+      </p:ext>
+    </p:extLst>
   </p:cSld>
   <p:clrMapOvr>
     <a:masterClrMapping/>
@@ -1829,7 +1871,7 @@
           <a:lstStyle/>
           <a:p>
             <a:r>
-              <a:rPr lang="en-US" altLang="zh-TW" smtClean="0"/>
+              <a:rPr lang="en-US" altLang="zh-TW"/>
               <a:t>Click to edit Master title style</a:t>
             </a:r>
             <a:endParaRPr lang="zh-TW" altLang="en-US"/>
@@ -1851,9 +1893,9 @@
           <a:bodyPr/>
           <a:lstStyle/>
           <a:p>
-            <a:fld id="{187F21F5-01BD-4ED2-8910-8626478F30B0}" type="datetimeFigureOut">
+            <a:fld id="{1C488704-7058-4526-95CD-2A163221AB6F}" type="datetimeFigureOut">
               <a:rPr lang="en-US" smtClean="0"/>
-              <a:t>6/22/2019</a:t>
+              <a:t>2/7/2025</a:t>
             </a:fld>
             <a:endParaRPr lang="en-US"/>
           </a:p>
@@ -1893,7 +1935,7 @@
           <a:bodyPr/>
           <a:lstStyle/>
           <a:p>
-            <a:fld id="{5A87A736-E95A-4A97-916E-DEEC45A466E6}" type="slidenum">
+            <a:fld id="{DC3A5D6F-BA08-4060-B078-EDC13354B14A}" type="slidenum">
               <a:rPr lang="en-US" smtClean="0"/>
               <a:t>‹#›</a:t>
             </a:fld>
@@ -1902,6 +1944,11 @@
         </p:txBody>
       </p:sp>
     </p:spTree>
+    <p:extLst>
+      <p:ext uri="{BB962C8B-B14F-4D97-AF65-F5344CB8AC3E}">
+        <p14:creationId xmlns:p14="http://schemas.microsoft.com/office/powerpoint/2010/main" val="1158377669"/>
+      </p:ext>
+    </p:extLst>
   </p:cSld>
   <p:clrMapOvr>
     <a:masterClrMapping/>
@@ -1941,9 +1988,9 @@
           <a:bodyPr/>
           <a:lstStyle/>
           <a:p>
-            <a:fld id="{187F21F5-01BD-4ED2-8910-8626478F30B0}" type="datetimeFigureOut">
+            <a:fld id="{1C488704-7058-4526-95CD-2A163221AB6F}" type="datetimeFigureOut">
               <a:rPr lang="en-US" smtClean="0"/>
-              <a:t>6/22/2019</a:t>
+              <a:t>2/7/2025</a:t>
             </a:fld>
             <a:endParaRPr lang="en-US"/>
           </a:p>
@@ -1983,7 +2030,7 @@
           <a:bodyPr/>
           <a:lstStyle/>
           <a:p>
-            <a:fld id="{5A87A736-E95A-4A97-916E-DEEC45A466E6}" type="slidenum">
+            <a:fld id="{DC3A5D6F-BA08-4060-B078-EDC13354B14A}" type="slidenum">
               <a:rPr lang="en-US" smtClean="0"/>
               <a:t>‹#›</a:t>
             </a:fld>
@@ -1992,6 +2039,11 @@
         </p:txBody>
       </p:sp>
     </p:spTree>
+    <p:extLst>
+      <p:ext uri="{BB962C8B-B14F-4D97-AF65-F5344CB8AC3E}">
+        <p14:creationId xmlns:p14="http://schemas.microsoft.com/office/powerpoint/2010/main" val="580719725"/>
+      </p:ext>
+    </p:extLst>
   </p:cSld>
   <p:clrMapOvr>
     <a:masterClrMapping/>
@@ -2028,20 +2080,20 @@
         </p:nvSpPr>
         <p:spPr>
           <a:xfrm>
-            <a:off x="457200" y="273050"/>
-            <a:ext cx="3008313" cy="1162050"/>
+            <a:off x="609603" y="273049"/>
+            <a:ext cx="4011084" cy="1162051"/>
           </a:xfrm>
         </p:spPr>
         <p:txBody>
           <a:bodyPr anchor="b"/>
           <a:lstStyle>
             <a:lvl1pPr algn="l">
-              <a:defRPr sz="2000" b="1"/>
+              <a:defRPr sz="2667" b="1"/>
             </a:lvl1pPr>
           </a:lstStyle>
           <a:p>
             <a:r>
-              <a:rPr lang="en-US" altLang="zh-TW" smtClean="0"/>
+              <a:rPr lang="en-US" altLang="zh-TW"/>
               <a:t>Click to edit Master title style</a:t>
             </a:r>
             <a:endParaRPr lang="zh-TW" altLang="en-US"/>
@@ -2060,73 +2112,73 @@
         </p:nvSpPr>
         <p:spPr>
           <a:xfrm>
-            <a:off x="3575050" y="273050"/>
-            <a:ext cx="5111750" cy="5853113"/>
+            <a:off x="4766733" y="273053"/>
+            <a:ext cx="6815667" cy="5853113"/>
           </a:xfrm>
         </p:spPr>
         <p:txBody>
           <a:bodyPr/>
           <a:lstStyle>
             <a:lvl1pPr>
-              <a:defRPr sz="3200"/>
+              <a:defRPr sz="4267"/>
             </a:lvl1pPr>
             <a:lvl2pPr>
-              <a:defRPr sz="2800"/>
+              <a:defRPr sz="3733"/>
             </a:lvl2pPr>
             <a:lvl3pPr>
-              <a:defRPr sz="2400"/>
+              <a:defRPr sz="3200"/>
             </a:lvl3pPr>
             <a:lvl4pPr>
-              <a:defRPr sz="2000"/>
+              <a:defRPr sz="2667"/>
             </a:lvl4pPr>
             <a:lvl5pPr>
-              <a:defRPr sz="2000"/>
+              <a:defRPr sz="2667"/>
             </a:lvl5pPr>
             <a:lvl6pPr>
-              <a:defRPr sz="2000"/>
+              <a:defRPr sz="2667"/>
             </a:lvl6pPr>
             <a:lvl7pPr>
-              <a:defRPr sz="2000"/>
+              <a:defRPr sz="2667"/>
             </a:lvl7pPr>
             <a:lvl8pPr>
-              <a:defRPr sz="2000"/>
+              <a:defRPr sz="2667"/>
             </a:lvl8pPr>
             <a:lvl9pPr>
-              <a:defRPr sz="2000"/>
+              <a:defRPr sz="2667"/>
             </a:lvl9pPr>
           </a:lstStyle>
           <a:p>
             <a:pPr lvl="0"/>
             <a:r>
-              <a:rPr lang="en-US" altLang="zh-TW" smtClean="0"/>
+              <a:rPr lang="en-US" altLang="zh-TW"/>
               <a:t>Click to edit Master text styles</a:t>
             </a:r>
           </a:p>
           <a:p>
             <a:pPr lvl="1"/>
             <a:r>
-              <a:rPr lang="en-US" altLang="zh-TW" smtClean="0"/>
+              <a:rPr lang="en-US" altLang="zh-TW"/>
               <a:t>Second level</a:t>
             </a:r>
           </a:p>
           <a:p>
             <a:pPr lvl="2"/>
             <a:r>
-              <a:rPr lang="en-US" altLang="zh-TW" smtClean="0"/>
+              <a:rPr lang="en-US" altLang="zh-TW"/>
               <a:t>Third level</a:t>
             </a:r>
           </a:p>
           <a:p>
             <a:pPr lvl="3"/>
             <a:r>
-              <a:rPr lang="en-US" altLang="zh-TW" smtClean="0"/>
+              <a:rPr lang="en-US" altLang="zh-TW"/>
               <a:t>Fourth level</a:t>
             </a:r>
           </a:p>
           <a:p>
             <a:pPr lvl="4"/>
             <a:r>
-              <a:rPr lang="en-US" altLang="zh-TW" smtClean="0"/>
+              <a:rPr lang="en-US" altLang="zh-TW"/>
               <a:t>Fifth level</a:t>
             </a:r>
             <a:endParaRPr lang="zh-TW" altLang="en-US"/>
@@ -2145,8 +2197,8 @@
         </p:nvSpPr>
         <p:spPr>
           <a:xfrm>
-            <a:off x="457200" y="1435100"/>
-            <a:ext cx="3008313" cy="4691063"/>
+            <a:off x="609603" y="1435103"/>
+            <a:ext cx="4011084" cy="4691063"/>
           </a:xfrm>
         </p:spPr>
         <p:txBody>
@@ -2154,45 +2206,45 @@
           <a:lstStyle>
             <a:lvl1pPr marL="0" indent="0">
               <a:buNone/>
-              <a:defRPr sz="1400"/>
+              <a:defRPr sz="1867"/>
             </a:lvl1pPr>
-            <a:lvl2pPr marL="457200" indent="0">
+            <a:lvl2pPr marL="609585" indent="0">
+              <a:buNone/>
+              <a:defRPr sz="1600"/>
+            </a:lvl2pPr>
+            <a:lvl3pPr marL="1219170" indent="0">
+              <a:buNone/>
+              <a:defRPr sz="1333"/>
+            </a:lvl3pPr>
+            <a:lvl4pPr marL="1828754" indent="0">
               <a:buNone/>
               <a:defRPr sz="1200"/>
-            </a:lvl2pPr>
-            <a:lvl3pPr marL="914400" indent="0">
-              <a:buNone/>
-              <a:defRPr sz="1000"/>
-            </a:lvl3pPr>
-            <a:lvl4pPr marL="1371600" indent="0">
-              <a:buNone/>
-              <a:defRPr sz="900"/>
             </a:lvl4pPr>
-            <a:lvl5pPr marL="1828800" indent="0">
-              <a:buNone/>
-              <a:defRPr sz="900"/>
+            <a:lvl5pPr marL="2438339" indent="0">
+              <a:buNone/>
+              <a:defRPr sz="1200"/>
             </a:lvl5pPr>
-            <a:lvl6pPr marL="2286000" indent="0">
-              <a:buNone/>
-              <a:defRPr sz="900"/>
+            <a:lvl6pPr marL="3047924" indent="0">
+              <a:buNone/>
+              <a:defRPr sz="1200"/>
             </a:lvl6pPr>
-            <a:lvl7pPr marL="2743200" indent="0">
-              <a:buNone/>
-              <a:defRPr sz="900"/>
+            <a:lvl7pPr marL="3657509" indent="0">
+              <a:buNone/>
+              <a:defRPr sz="1200"/>
             </a:lvl7pPr>
-            <a:lvl8pPr marL="3200400" indent="0">
-              <a:buNone/>
-              <a:defRPr sz="900"/>
+            <a:lvl8pPr marL="4267093" indent="0">
+              <a:buNone/>
+              <a:defRPr sz="1200"/>
             </a:lvl8pPr>
-            <a:lvl9pPr marL="3657600" indent="0">
-              <a:buNone/>
-              <a:defRPr sz="900"/>
+            <a:lvl9pPr marL="4876678" indent="0">
+              <a:buNone/>
+              <a:defRPr sz="1200"/>
             </a:lvl9pPr>
           </a:lstStyle>
           <a:p>
             <a:pPr lvl="0"/>
             <a:r>
-              <a:rPr lang="en-US" altLang="zh-TW" smtClean="0"/>
+              <a:rPr lang="en-US" altLang="zh-TW"/>
               <a:t>Click to edit Master text styles</a:t>
             </a:r>
           </a:p>
@@ -2213,9 +2265,9 @@
           <a:bodyPr/>
           <a:lstStyle/>
           <a:p>
-            <a:fld id="{187F21F5-01BD-4ED2-8910-8626478F30B0}" type="datetimeFigureOut">
+            <a:fld id="{1C488704-7058-4526-95CD-2A163221AB6F}" type="datetimeFigureOut">
               <a:rPr lang="en-US" smtClean="0"/>
-              <a:t>6/22/2019</a:t>
+              <a:t>2/7/2025</a:t>
             </a:fld>
             <a:endParaRPr lang="en-US"/>
           </a:p>
@@ -2255,7 +2307,7 @@
           <a:bodyPr/>
           <a:lstStyle/>
           <a:p>
-            <a:fld id="{5A87A736-E95A-4A97-916E-DEEC45A466E6}" type="slidenum">
+            <a:fld id="{DC3A5D6F-BA08-4060-B078-EDC13354B14A}" type="slidenum">
               <a:rPr lang="en-US" smtClean="0"/>
               <a:t>‹#›</a:t>
             </a:fld>
@@ -2264,6 +2316,11 @@
         </p:txBody>
       </p:sp>
     </p:spTree>
+    <p:extLst>
+      <p:ext uri="{BB962C8B-B14F-4D97-AF65-F5344CB8AC3E}">
+        <p14:creationId xmlns:p14="http://schemas.microsoft.com/office/powerpoint/2010/main" val="3033255275"/>
+      </p:ext>
+    </p:extLst>
   </p:cSld>
   <p:clrMapOvr>
     <a:masterClrMapping/>
@@ -2300,20 +2357,20 @@
         </p:nvSpPr>
         <p:spPr>
           <a:xfrm>
-            <a:off x="1792288" y="4800600"/>
-            <a:ext cx="5486400" cy="566738"/>
+            <a:off x="2389717" y="4800601"/>
+            <a:ext cx="7315200" cy="566739"/>
           </a:xfrm>
         </p:spPr>
         <p:txBody>
           <a:bodyPr anchor="b"/>
           <a:lstStyle>
             <a:lvl1pPr algn="l">
-              <a:defRPr sz="2000" b="1"/>
+              <a:defRPr sz="2667" b="1"/>
             </a:lvl1pPr>
           </a:lstStyle>
           <a:p>
             <a:r>
-              <a:rPr lang="en-US" altLang="zh-TW" smtClean="0"/>
+              <a:rPr lang="en-US" altLang="zh-TW"/>
               <a:t>Click to edit Master title style</a:t>
             </a:r>
             <a:endParaRPr lang="zh-TW" altLang="en-US"/>
@@ -2332,8 +2389,8 @@
         </p:nvSpPr>
         <p:spPr>
           <a:xfrm>
-            <a:off x="1792288" y="612775"/>
-            <a:ext cx="5486400" cy="4114800"/>
+            <a:off x="2389717" y="612775"/>
+            <a:ext cx="7315200" cy="4114800"/>
           </a:xfrm>
         </p:spPr>
         <p:txBody>
@@ -2341,44 +2398,44 @@
           <a:lstStyle>
             <a:lvl1pPr marL="0" indent="0">
               <a:buNone/>
+              <a:defRPr sz="4267"/>
+            </a:lvl1pPr>
+            <a:lvl2pPr marL="609585" indent="0">
+              <a:buNone/>
+              <a:defRPr sz="3733"/>
+            </a:lvl2pPr>
+            <a:lvl3pPr marL="1219170" indent="0">
+              <a:buNone/>
               <a:defRPr sz="3200"/>
-            </a:lvl1pPr>
-            <a:lvl2pPr marL="457200" indent="0">
-              <a:buNone/>
-              <a:defRPr sz="2800"/>
-            </a:lvl2pPr>
-            <a:lvl3pPr marL="914400" indent="0">
-              <a:buNone/>
-              <a:defRPr sz="2400"/>
             </a:lvl3pPr>
-            <a:lvl4pPr marL="1371600" indent="0">
-              <a:buNone/>
-              <a:defRPr sz="2000"/>
+            <a:lvl4pPr marL="1828754" indent="0">
+              <a:buNone/>
+              <a:defRPr sz="2667"/>
             </a:lvl4pPr>
-            <a:lvl5pPr marL="1828800" indent="0">
-              <a:buNone/>
-              <a:defRPr sz="2000"/>
+            <a:lvl5pPr marL="2438339" indent="0">
+              <a:buNone/>
+              <a:defRPr sz="2667"/>
             </a:lvl5pPr>
-            <a:lvl6pPr marL="2286000" indent="0">
-              <a:buNone/>
-              <a:defRPr sz="2000"/>
+            <a:lvl6pPr marL="3047924" indent="0">
+              <a:buNone/>
+              <a:defRPr sz="2667"/>
             </a:lvl6pPr>
-            <a:lvl7pPr marL="2743200" indent="0">
-              <a:buNone/>
-              <a:defRPr sz="2000"/>
+            <a:lvl7pPr marL="3657509" indent="0">
+              <a:buNone/>
+              <a:defRPr sz="2667"/>
             </a:lvl7pPr>
-            <a:lvl8pPr marL="3200400" indent="0">
-              <a:buNone/>
-              <a:defRPr sz="2000"/>
+            <a:lvl8pPr marL="4267093" indent="0">
+              <a:buNone/>
+              <a:defRPr sz="2667"/>
             </a:lvl8pPr>
-            <a:lvl9pPr marL="3657600" indent="0">
-              <a:buNone/>
-              <a:defRPr sz="2000"/>
+            <a:lvl9pPr marL="4876678" indent="0">
+              <a:buNone/>
+              <a:defRPr sz="2667"/>
             </a:lvl9pPr>
           </a:lstStyle>
           <a:p>
             <a:r>
-              <a:rPr lang="en-US" altLang="zh-TW" smtClean="0"/>
+              <a:rPr lang="en-US" altLang="zh-TW"/>
               <a:t>Click icon to add picture</a:t>
             </a:r>
             <a:endParaRPr lang="zh-TW" altLang="en-US"/>
@@ -2397,8 +2454,8 @@
         </p:nvSpPr>
         <p:spPr>
           <a:xfrm>
-            <a:off x="1792288" y="5367338"/>
-            <a:ext cx="5486400" cy="804862"/>
+            <a:off x="2389717" y="5367339"/>
+            <a:ext cx="7315200" cy="804863"/>
           </a:xfrm>
         </p:spPr>
         <p:txBody>
@@ -2406,45 +2463,45 @@
           <a:lstStyle>
             <a:lvl1pPr marL="0" indent="0">
               <a:buNone/>
-              <a:defRPr sz="1400"/>
+              <a:defRPr sz="1867"/>
             </a:lvl1pPr>
-            <a:lvl2pPr marL="457200" indent="0">
+            <a:lvl2pPr marL="609585" indent="0">
+              <a:buNone/>
+              <a:defRPr sz="1600"/>
+            </a:lvl2pPr>
+            <a:lvl3pPr marL="1219170" indent="0">
+              <a:buNone/>
+              <a:defRPr sz="1333"/>
+            </a:lvl3pPr>
+            <a:lvl4pPr marL="1828754" indent="0">
               <a:buNone/>
               <a:defRPr sz="1200"/>
-            </a:lvl2pPr>
-            <a:lvl3pPr marL="914400" indent="0">
-              <a:buNone/>
-              <a:defRPr sz="1000"/>
-            </a:lvl3pPr>
-            <a:lvl4pPr marL="1371600" indent="0">
-              <a:buNone/>
-              <a:defRPr sz="900"/>
             </a:lvl4pPr>
-            <a:lvl5pPr marL="1828800" indent="0">
-              <a:buNone/>
-              <a:defRPr sz="900"/>
+            <a:lvl5pPr marL="2438339" indent="0">
+              <a:buNone/>
+              <a:defRPr sz="1200"/>
             </a:lvl5pPr>
-            <a:lvl6pPr marL="2286000" indent="0">
-              <a:buNone/>
-              <a:defRPr sz="900"/>
+            <a:lvl6pPr marL="3047924" indent="0">
+              <a:buNone/>
+              <a:defRPr sz="1200"/>
             </a:lvl6pPr>
-            <a:lvl7pPr marL="2743200" indent="0">
-              <a:buNone/>
-              <a:defRPr sz="900"/>
+            <a:lvl7pPr marL="3657509" indent="0">
+              <a:buNone/>
+              <a:defRPr sz="1200"/>
             </a:lvl7pPr>
-            <a:lvl8pPr marL="3200400" indent="0">
-              <a:buNone/>
-              <a:defRPr sz="900"/>
+            <a:lvl8pPr marL="4267093" indent="0">
+              <a:buNone/>
+              <a:defRPr sz="1200"/>
             </a:lvl8pPr>
-            <a:lvl9pPr marL="3657600" indent="0">
-              <a:buNone/>
-              <a:defRPr sz="900"/>
+            <a:lvl9pPr marL="4876678" indent="0">
+              <a:buNone/>
+              <a:defRPr sz="1200"/>
             </a:lvl9pPr>
           </a:lstStyle>
           <a:p>
             <a:pPr lvl="0"/>
             <a:r>
-              <a:rPr lang="en-US" altLang="zh-TW" smtClean="0"/>
+              <a:rPr lang="en-US" altLang="zh-TW"/>
               <a:t>Click to edit Master text styles</a:t>
             </a:r>
           </a:p>
@@ -2465,9 +2522,9 @@
           <a:bodyPr/>
           <a:lstStyle/>
           <a:p>
-            <a:fld id="{187F21F5-01BD-4ED2-8910-8626478F30B0}" type="datetimeFigureOut">
+            <a:fld id="{1C488704-7058-4526-95CD-2A163221AB6F}" type="datetimeFigureOut">
               <a:rPr lang="en-US" smtClean="0"/>
-              <a:t>6/22/2019</a:t>
+              <a:t>2/7/2025</a:t>
             </a:fld>
             <a:endParaRPr lang="en-US"/>
           </a:p>
@@ -2507,7 +2564,7 @@
           <a:bodyPr/>
           <a:lstStyle/>
           <a:p>
-            <a:fld id="{5A87A736-E95A-4A97-916E-DEEC45A466E6}" type="slidenum">
+            <a:fld id="{DC3A5D6F-BA08-4060-B078-EDC13354B14A}" type="slidenum">
               <a:rPr lang="en-US" smtClean="0"/>
               <a:t>‹#›</a:t>
             </a:fld>
@@ -2516,6 +2573,11 @@
         </p:txBody>
       </p:sp>
     </p:spTree>
+    <p:extLst>
+      <p:ext uri="{BB962C8B-B14F-4D97-AF65-F5344CB8AC3E}">
+        <p14:creationId xmlns:p14="http://schemas.microsoft.com/office/powerpoint/2010/main" val="3304836746"/>
+      </p:ext>
+    </p:extLst>
   </p:cSld>
   <p:clrMapOvr>
     <a:masterClrMapping/>
@@ -2562,8 +2624,8 @@
         </p:nvSpPr>
         <p:spPr>
           <a:xfrm>
-            <a:off x="457200" y="274638"/>
-            <a:ext cx="8229600" cy="1143000"/>
+            <a:off x="609600" y="274637"/>
+            <a:ext cx="10972800" cy="1143000"/>
           </a:xfrm>
           <a:prstGeom prst="rect">
             <a:avLst/>
@@ -2576,10 +2638,9 @@
           <a:lstStyle/>
           <a:p>
             <a:r>
-              <a:rPr lang="zh-TW" altLang="en-US" smtClean="0"/>
+              <a:rPr lang="zh-TW" altLang="en-US"/>
               <a:t>按一下以編輯母片標題樣式</a:t>
             </a:r>
-            <a:endParaRPr lang="zh-TW" altLang="en-US"/>
           </a:p>
         </p:txBody>
       </p:sp>
@@ -2595,8 +2656,8 @@
         </p:nvSpPr>
         <p:spPr>
           <a:xfrm>
-            <a:off x="457200" y="1600200"/>
-            <a:ext cx="8229600" cy="4525963"/>
+            <a:off x="609600" y="1600201"/>
+            <a:ext cx="10972800" cy="4525963"/>
           </a:xfrm>
           <a:prstGeom prst="rect">
             <a:avLst/>
@@ -2610,38 +2671,37 @@
           <a:p>
             <a:pPr lvl="0"/>
             <a:r>
-              <a:rPr lang="zh-TW" altLang="en-US" smtClean="0"/>
+              <a:rPr lang="zh-TW" altLang="en-US"/>
               <a:t>按一下以編輯母片文字樣式</a:t>
             </a:r>
           </a:p>
           <a:p>
             <a:pPr lvl="1"/>
             <a:r>
-              <a:rPr lang="zh-TW" altLang="en-US" smtClean="0"/>
+              <a:rPr lang="zh-TW" altLang="en-US"/>
               <a:t>第二層</a:t>
             </a:r>
           </a:p>
           <a:p>
             <a:pPr lvl="2"/>
             <a:r>
-              <a:rPr lang="zh-TW" altLang="en-US" smtClean="0"/>
+              <a:rPr lang="zh-TW" altLang="en-US"/>
               <a:t>第三層</a:t>
             </a:r>
           </a:p>
           <a:p>
             <a:pPr lvl="3"/>
             <a:r>
-              <a:rPr lang="zh-TW" altLang="en-US" smtClean="0"/>
+              <a:rPr lang="zh-TW" altLang="en-US"/>
               <a:t>第四層</a:t>
             </a:r>
           </a:p>
           <a:p>
             <a:pPr lvl="4"/>
             <a:r>
-              <a:rPr lang="zh-TW" altLang="en-US" smtClean="0"/>
+              <a:rPr lang="zh-TW" altLang="en-US"/>
               <a:t>第五層</a:t>
             </a:r>
-            <a:endParaRPr lang="zh-TW" altLang="en-US"/>
           </a:p>
         </p:txBody>
       </p:sp>
@@ -2657,8 +2717,8 @@
         </p:nvSpPr>
         <p:spPr>
           <a:xfrm>
-            <a:off x="457200" y="6356350"/>
-            <a:ext cx="2133600" cy="365125"/>
+            <a:off x="609600" y="6356352"/>
+            <a:ext cx="2844800" cy="365125"/>
           </a:xfrm>
           <a:prstGeom prst="rect">
             <a:avLst/>
@@ -2668,7 +2728,7 @@
           <a:bodyPr vert="horz" lIns="91440" tIns="45720" rIns="91440" bIns="45720" rtlCol="0" anchor="ctr"/>
           <a:lstStyle>
             <a:lvl1pPr algn="l">
-              <a:defRPr sz="1200">
+              <a:defRPr sz="1600">
                 <a:solidFill>
                   <a:schemeClr val="tx1">
                     <a:tint val="75000"/>
@@ -2678,9 +2738,9 @@
             </a:lvl1pPr>
           </a:lstStyle>
           <a:p>
-            <a:fld id="{187F21F5-01BD-4ED2-8910-8626478F30B0}" type="datetimeFigureOut">
+            <a:fld id="{1C488704-7058-4526-95CD-2A163221AB6F}" type="datetimeFigureOut">
               <a:rPr lang="en-US" smtClean="0"/>
-              <a:t>6/22/2019</a:t>
+              <a:t>2/7/2025</a:t>
             </a:fld>
             <a:endParaRPr lang="en-US"/>
           </a:p>
@@ -2698,8 +2758,8 @@
         </p:nvSpPr>
         <p:spPr>
           <a:xfrm>
-            <a:off x="3124200" y="6356350"/>
-            <a:ext cx="2895600" cy="365125"/>
+            <a:off x="4165600" y="6356352"/>
+            <a:ext cx="3860800" cy="365125"/>
           </a:xfrm>
           <a:prstGeom prst="rect">
             <a:avLst/>
@@ -2709,7 +2769,7 @@
           <a:bodyPr vert="horz" lIns="91440" tIns="45720" rIns="91440" bIns="45720" rtlCol="0" anchor="ctr"/>
           <a:lstStyle>
             <a:lvl1pPr algn="ctr">
-              <a:defRPr sz="1200">
+              <a:defRPr sz="1600">
                 <a:solidFill>
                   <a:schemeClr val="tx1">
                     <a:tint val="75000"/>
@@ -2735,8 +2795,8 @@
         </p:nvSpPr>
         <p:spPr>
           <a:xfrm>
-            <a:off x="6553200" y="6356350"/>
-            <a:ext cx="2133600" cy="365125"/>
+            <a:off x="8737600" y="6356352"/>
+            <a:ext cx="2844800" cy="365125"/>
           </a:xfrm>
           <a:prstGeom prst="rect">
             <a:avLst/>
@@ -2746,7 +2806,7 @@
           <a:bodyPr vert="horz" lIns="91440" tIns="45720" rIns="91440" bIns="45720" rtlCol="0" anchor="ctr"/>
           <a:lstStyle>
             <a:lvl1pPr algn="r">
-              <a:defRPr sz="1200">
+              <a:defRPr sz="1600">
                 <a:solidFill>
                   <a:schemeClr val="tx1">
                     <a:tint val="75000"/>
@@ -2756,7 +2816,7 @@
             </a:lvl1pPr>
           </a:lstStyle>
           <a:p>
-            <a:fld id="{5A87A736-E95A-4A97-916E-DEEC45A466E6}" type="slidenum">
+            <a:fld id="{DC3A5D6F-BA08-4060-B078-EDC13354B14A}" type="slidenum">
               <a:rPr lang="en-US" smtClean="0"/>
               <a:t>‹#›</a:t>
             </a:fld>
@@ -2765,6 +2825,11 @@
         </p:txBody>
       </p:sp>
     </p:spTree>
+    <p:extLst>
+      <p:ext uri="{BB962C8B-B14F-4D97-AF65-F5344CB8AC3E}">
+        <p14:creationId xmlns:p14="http://schemas.microsoft.com/office/powerpoint/2010/main" val="3155821109"/>
+      </p:ext>
+    </p:extLst>
   </p:cSld>
   <p:clrMap bg1="lt1" tx1="dk1" bg2="lt2" tx2="dk2" accent1="accent1" accent2="accent2" accent3="accent3" accent4="accent4" accent5="accent5" accent6="accent6" hlink="hlink" folHlink="folHlink"/>
   <p:sldLayoutIdLst>
@@ -2782,12 +2847,12 @@
   </p:sldLayoutIdLst>
   <p:txStyles>
     <p:titleStyle>
-      <a:lvl1pPr algn="ctr" defTabSz="914400" rtl="0" eaLnBrk="1" latinLnBrk="0" hangingPunct="1">
+      <a:lvl1pPr algn="ctr" defTabSz="1219170" rtl="0" eaLnBrk="1" latinLnBrk="0" hangingPunct="1">
         <a:spcBef>
           <a:spcPct val="0"/>
         </a:spcBef>
         <a:buNone/>
-        <a:defRPr sz="4400" kern="1200">
+        <a:defRPr sz="5867" kern="1200">
           <a:solidFill>
             <a:schemeClr val="tx1"/>
           </a:solidFill>
@@ -2798,11 +2863,41 @@
       </a:lvl1pPr>
     </p:titleStyle>
     <p:bodyStyle>
-      <a:lvl1pPr marL="342900" indent="-342900" algn="l" defTabSz="914400" rtl="0" eaLnBrk="1" latinLnBrk="0" hangingPunct="1">
+      <a:lvl1pPr marL="457189" indent="-457189" algn="l" defTabSz="1219170" rtl="0" eaLnBrk="1" latinLnBrk="0" hangingPunct="1">
         <a:spcBef>
           <a:spcPct val="20000"/>
         </a:spcBef>
-        <a:buFont typeface="Arial" pitchFamily="34" charset="0"/>
+        <a:buFont typeface="Arial" panose="02080604020202020204" pitchFamily="34" charset="0"/>
+        <a:buChar char="•"/>
+        <a:defRPr sz="4267" kern="1200">
+          <a:solidFill>
+            <a:schemeClr val="tx1"/>
+          </a:solidFill>
+          <a:latin typeface="+mn-lt"/>
+          <a:ea typeface="+mn-ea"/>
+          <a:cs typeface="+mn-cs"/>
+        </a:defRPr>
+      </a:lvl1pPr>
+      <a:lvl2pPr marL="990575" indent="-380990" algn="l" defTabSz="1219170" rtl="0" eaLnBrk="1" latinLnBrk="0" hangingPunct="1">
+        <a:spcBef>
+          <a:spcPct val="20000"/>
+        </a:spcBef>
+        <a:buFont typeface="Arial" panose="02080604020202020204" pitchFamily="34" charset="0"/>
+        <a:buChar char="–"/>
+        <a:defRPr sz="3733" kern="1200">
+          <a:solidFill>
+            <a:schemeClr val="tx1"/>
+          </a:solidFill>
+          <a:latin typeface="+mn-lt"/>
+          <a:ea typeface="+mn-ea"/>
+          <a:cs typeface="+mn-cs"/>
+        </a:defRPr>
+      </a:lvl2pPr>
+      <a:lvl3pPr marL="1523962" indent="-304792" algn="l" defTabSz="1219170" rtl="0" eaLnBrk="1" latinLnBrk="0" hangingPunct="1">
+        <a:spcBef>
+          <a:spcPct val="20000"/>
+        </a:spcBef>
+        <a:buFont typeface="Arial" panose="02080604020202020204" pitchFamily="34" charset="0"/>
         <a:buChar char="•"/>
         <a:defRPr sz="3200" kern="1200">
           <a:solidFill>
@@ -2812,44 +2907,14 @@
           <a:ea typeface="+mn-ea"/>
           <a:cs typeface="+mn-cs"/>
         </a:defRPr>
-      </a:lvl1pPr>
-      <a:lvl2pPr marL="742950" indent="-285750" algn="l" defTabSz="914400" rtl="0" eaLnBrk="1" latinLnBrk="0" hangingPunct="1">
+      </a:lvl3pPr>
+      <a:lvl4pPr marL="2133547" indent="-304792" algn="l" defTabSz="1219170" rtl="0" eaLnBrk="1" latinLnBrk="0" hangingPunct="1">
         <a:spcBef>
           <a:spcPct val="20000"/>
         </a:spcBef>
-        <a:buFont typeface="Arial" pitchFamily="34" charset="0"/>
+        <a:buFont typeface="Arial" panose="02080604020202020204" pitchFamily="34" charset="0"/>
         <a:buChar char="–"/>
-        <a:defRPr sz="2800" kern="1200">
-          <a:solidFill>
-            <a:schemeClr val="tx1"/>
-          </a:solidFill>
-          <a:latin typeface="+mn-lt"/>
-          <a:ea typeface="+mn-ea"/>
-          <a:cs typeface="+mn-cs"/>
-        </a:defRPr>
-      </a:lvl2pPr>
-      <a:lvl3pPr marL="1143000" indent="-228600" algn="l" defTabSz="914400" rtl="0" eaLnBrk="1" latinLnBrk="0" hangingPunct="1">
-        <a:spcBef>
-          <a:spcPct val="20000"/>
-        </a:spcBef>
-        <a:buFont typeface="Arial" pitchFamily="34" charset="0"/>
-        <a:buChar char="•"/>
-        <a:defRPr sz="2400" kern="1200">
-          <a:solidFill>
-            <a:schemeClr val="tx1"/>
-          </a:solidFill>
-          <a:latin typeface="+mn-lt"/>
-          <a:ea typeface="+mn-ea"/>
-          <a:cs typeface="+mn-cs"/>
-        </a:defRPr>
-      </a:lvl3pPr>
-      <a:lvl4pPr marL="1600200" indent="-228600" algn="l" defTabSz="914400" rtl="0" eaLnBrk="1" latinLnBrk="0" hangingPunct="1">
-        <a:spcBef>
-          <a:spcPct val="20000"/>
-        </a:spcBef>
-        <a:buFont typeface="Arial" pitchFamily="34" charset="0"/>
-        <a:buChar char="–"/>
-        <a:defRPr sz="2000" kern="1200">
+        <a:defRPr sz="2667" kern="1200">
           <a:solidFill>
             <a:schemeClr val="tx1"/>
           </a:solidFill>
@@ -2858,13 +2923,13 @@
           <a:cs typeface="+mn-cs"/>
         </a:defRPr>
       </a:lvl4pPr>
-      <a:lvl5pPr marL="2057400" indent="-228600" algn="l" defTabSz="914400" rtl="0" eaLnBrk="1" latinLnBrk="0" hangingPunct="1">
+      <a:lvl5pPr marL="2743131" indent="-304792" algn="l" defTabSz="1219170" rtl="0" eaLnBrk="1" latinLnBrk="0" hangingPunct="1">
         <a:spcBef>
           <a:spcPct val="20000"/>
         </a:spcBef>
-        <a:buFont typeface="Arial" pitchFamily="34" charset="0"/>
+        <a:buFont typeface="Arial" panose="02080604020202020204" pitchFamily="34" charset="0"/>
         <a:buChar char="»"/>
-        <a:defRPr sz="2000" kern="1200">
+        <a:defRPr sz="2667" kern="1200">
           <a:solidFill>
             <a:schemeClr val="tx1"/>
           </a:solidFill>
@@ -2873,13 +2938,13 @@
           <a:cs typeface="+mn-cs"/>
         </a:defRPr>
       </a:lvl5pPr>
-      <a:lvl6pPr marL="2514600" indent="-228600" algn="l" defTabSz="914400" rtl="0" eaLnBrk="1" latinLnBrk="0" hangingPunct="1">
+      <a:lvl6pPr marL="3352716" indent="-304792" algn="l" defTabSz="1219170" rtl="0" eaLnBrk="1" latinLnBrk="0" hangingPunct="1">
         <a:spcBef>
           <a:spcPct val="20000"/>
         </a:spcBef>
-        <a:buFont typeface="Arial" pitchFamily="34" charset="0"/>
+        <a:buFont typeface="Arial" panose="02080604020202020204" pitchFamily="34" charset="0"/>
         <a:buChar char="•"/>
-        <a:defRPr sz="2000" kern="1200">
+        <a:defRPr sz="2667" kern="1200">
           <a:solidFill>
             <a:schemeClr val="tx1"/>
           </a:solidFill>
@@ -2888,13 +2953,13 @@
           <a:cs typeface="+mn-cs"/>
         </a:defRPr>
       </a:lvl6pPr>
-      <a:lvl7pPr marL="2971800" indent="-228600" algn="l" defTabSz="914400" rtl="0" eaLnBrk="1" latinLnBrk="0" hangingPunct="1">
+      <a:lvl7pPr marL="3962301" indent="-304792" algn="l" defTabSz="1219170" rtl="0" eaLnBrk="1" latinLnBrk="0" hangingPunct="1">
         <a:spcBef>
           <a:spcPct val="20000"/>
         </a:spcBef>
-        <a:buFont typeface="Arial" pitchFamily="34" charset="0"/>
+        <a:buFont typeface="Arial" panose="02080604020202020204" pitchFamily="34" charset="0"/>
         <a:buChar char="•"/>
-        <a:defRPr sz="2000" kern="1200">
+        <a:defRPr sz="2667" kern="1200">
           <a:solidFill>
             <a:schemeClr val="tx1"/>
           </a:solidFill>
@@ -2903,13 +2968,13 @@
           <a:cs typeface="+mn-cs"/>
         </a:defRPr>
       </a:lvl7pPr>
-      <a:lvl8pPr marL="3429000" indent="-228600" algn="l" defTabSz="914400" rtl="0" eaLnBrk="1" latinLnBrk="0" hangingPunct="1">
+      <a:lvl8pPr marL="4571886" indent="-304792" algn="l" defTabSz="1219170" rtl="0" eaLnBrk="1" latinLnBrk="0" hangingPunct="1">
         <a:spcBef>
           <a:spcPct val="20000"/>
         </a:spcBef>
-        <a:buFont typeface="Arial" pitchFamily="34" charset="0"/>
+        <a:buFont typeface="Arial" panose="02080604020202020204" pitchFamily="34" charset="0"/>
         <a:buChar char="•"/>
-        <a:defRPr sz="2000" kern="1200">
+        <a:defRPr sz="2667" kern="1200">
           <a:solidFill>
             <a:schemeClr val="tx1"/>
           </a:solidFill>
@@ -2918,13 +2983,13 @@
           <a:cs typeface="+mn-cs"/>
         </a:defRPr>
       </a:lvl8pPr>
-      <a:lvl9pPr marL="3886200" indent="-228600" algn="l" defTabSz="914400" rtl="0" eaLnBrk="1" latinLnBrk="0" hangingPunct="1">
+      <a:lvl9pPr marL="5181470" indent="-304792" algn="l" defTabSz="1219170" rtl="0" eaLnBrk="1" latinLnBrk="0" hangingPunct="1">
         <a:spcBef>
           <a:spcPct val="20000"/>
         </a:spcBef>
-        <a:buFont typeface="Arial" pitchFamily="34" charset="0"/>
+        <a:buFont typeface="Arial" panose="02080604020202020204" pitchFamily="34" charset="0"/>
         <a:buChar char="•"/>
-        <a:defRPr sz="2000" kern="1200">
+        <a:defRPr sz="2667" kern="1200">
           <a:solidFill>
             <a:schemeClr val="tx1"/>
           </a:solidFill>
@@ -2938,8 +3003,8 @@
       <a:defPPr>
         <a:defRPr lang="zh-TW"/>
       </a:defPPr>
-      <a:lvl1pPr marL="0" algn="l" defTabSz="914400" rtl="0" eaLnBrk="1" latinLnBrk="0" hangingPunct="1">
-        <a:defRPr sz="1800" kern="1200">
+      <a:lvl1pPr marL="0" algn="l" defTabSz="1219170" rtl="0" eaLnBrk="1" latinLnBrk="0" hangingPunct="1">
+        <a:defRPr sz="2400" kern="1200">
           <a:solidFill>
             <a:schemeClr val="tx1"/>
           </a:solidFill>
@@ -2948,8 +3013,8 @@
           <a:cs typeface="+mn-cs"/>
         </a:defRPr>
       </a:lvl1pPr>
-      <a:lvl2pPr marL="457200" algn="l" defTabSz="914400" rtl="0" eaLnBrk="1" latinLnBrk="0" hangingPunct="1">
-        <a:defRPr sz="1800" kern="1200">
+      <a:lvl2pPr marL="609585" algn="l" defTabSz="1219170" rtl="0" eaLnBrk="1" latinLnBrk="0" hangingPunct="1">
+        <a:defRPr sz="2400" kern="1200">
           <a:solidFill>
             <a:schemeClr val="tx1"/>
           </a:solidFill>
@@ -2958,8 +3023,8 @@
           <a:cs typeface="+mn-cs"/>
         </a:defRPr>
       </a:lvl2pPr>
-      <a:lvl3pPr marL="914400" algn="l" defTabSz="914400" rtl="0" eaLnBrk="1" latinLnBrk="0" hangingPunct="1">
-        <a:defRPr sz="1800" kern="1200">
+      <a:lvl3pPr marL="1219170" algn="l" defTabSz="1219170" rtl="0" eaLnBrk="1" latinLnBrk="0" hangingPunct="1">
+        <a:defRPr sz="2400" kern="1200">
           <a:solidFill>
             <a:schemeClr val="tx1"/>
           </a:solidFill>
@@ -2968,8 +3033,8 @@
           <a:cs typeface="+mn-cs"/>
         </a:defRPr>
       </a:lvl3pPr>
-      <a:lvl4pPr marL="1371600" algn="l" defTabSz="914400" rtl="0" eaLnBrk="1" latinLnBrk="0" hangingPunct="1">
-        <a:defRPr sz="1800" kern="1200">
+      <a:lvl4pPr marL="1828754" algn="l" defTabSz="1219170" rtl="0" eaLnBrk="1" latinLnBrk="0" hangingPunct="1">
+        <a:defRPr sz="2400" kern="1200">
           <a:solidFill>
             <a:schemeClr val="tx1"/>
           </a:solidFill>
@@ -2978,8 +3043,8 @@
           <a:cs typeface="+mn-cs"/>
         </a:defRPr>
       </a:lvl4pPr>
-      <a:lvl5pPr marL="1828800" algn="l" defTabSz="914400" rtl="0" eaLnBrk="1" latinLnBrk="0" hangingPunct="1">
-        <a:defRPr sz="1800" kern="1200">
+      <a:lvl5pPr marL="2438339" algn="l" defTabSz="1219170" rtl="0" eaLnBrk="1" latinLnBrk="0" hangingPunct="1">
+        <a:defRPr sz="2400" kern="1200">
           <a:solidFill>
             <a:schemeClr val="tx1"/>
           </a:solidFill>
@@ -2988,8 +3053,8 @@
           <a:cs typeface="+mn-cs"/>
         </a:defRPr>
       </a:lvl5pPr>
-      <a:lvl6pPr marL="2286000" algn="l" defTabSz="914400" rtl="0" eaLnBrk="1" latinLnBrk="0" hangingPunct="1">
-        <a:defRPr sz="1800" kern="1200">
+      <a:lvl6pPr marL="3047924" algn="l" defTabSz="1219170" rtl="0" eaLnBrk="1" latinLnBrk="0" hangingPunct="1">
+        <a:defRPr sz="2400" kern="1200">
           <a:solidFill>
             <a:schemeClr val="tx1"/>
           </a:solidFill>
@@ -2998,8 +3063,8 @@
           <a:cs typeface="+mn-cs"/>
         </a:defRPr>
       </a:lvl6pPr>
-      <a:lvl7pPr marL="2743200" algn="l" defTabSz="914400" rtl="0" eaLnBrk="1" latinLnBrk="0" hangingPunct="1">
-        <a:defRPr sz="1800" kern="1200">
+      <a:lvl7pPr marL="3657509" algn="l" defTabSz="1219170" rtl="0" eaLnBrk="1" latinLnBrk="0" hangingPunct="1">
+        <a:defRPr sz="2400" kern="1200">
           <a:solidFill>
             <a:schemeClr val="tx1"/>
           </a:solidFill>
@@ -3008,8 +3073,8 @@
           <a:cs typeface="+mn-cs"/>
         </a:defRPr>
       </a:lvl7pPr>
-      <a:lvl8pPr marL="3200400" algn="l" defTabSz="914400" rtl="0" eaLnBrk="1" latinLnBrk="0" hangingPunct="1">
-        <a:defRPr sz="1800" kern="1200">
+      <a:lvl8pPr marL="4267093" algn="l" defTabSz="1219170" rtl="0" eaLnBrk="1" latinLnBrk="0" hangingPunct="1">
+        <a:defRPr sz="2400" kern="1200">
           <a:solidFill>
             <a:schemeClr val="tx1"/>
           </a:solidFill>
@@ -3018,8 +3083,8 @@
           <a:cs typeface="+mn-cs"/>
         </a:defRPr>
       </a:lvl8pPr>
-      <a:lvl9pPr marL="3657600" algn="l" defTabSz="914400" rtl="0" eaLnBrk="1" latinLnBrk="0" hangingPunct="1">
-        <a:defRPr sz="1800" kern="1200">
+      <a:lvl9pPr marL="4876678" algn="l" defTabSz="1219170" rtl="0" eaLnBrk="1" latinLnBrk="0" hangingPunct="1">
+        <a:defRPr sz="2400" kern="1200">
           <a:solidFill>
             <a:schemeClr val="tx1"/>
           </a:solidFill>
@@ -3038,7 +3103,13 @@
   <p:cSld>
     <p:spTree>
       <p:nvGrpSpPr>
-        <p:cNvPr id="1" name=""/>
+        <p:cNvPr id="1" name="">
+          <a:extLst>
+            <a:ext uri="{FF2B5EF4-FFF2-40B4-BE49-F238E27FC236}">
+              <a16:creationId xmlns:a16="http://schemas.microsoft.com/office/drawing/2014/main" id="{5F20F3D7-EDDF-CE30-9060-314A88E3730B}"/>
+            </a:ext>
+          </a:extLst>
+        </p:cNvPr>
         <p:cNvGrpSpPr/>
         <p:nvPr/>
       </p:nvGrpSpPr>
@@ -3052,7 +3123,13 @@
       </p:grpSpPr>
       <p:sp>
         <p:nvSpPr>
-          <p:cNvPr id="2" name="Title 1"/>
+          <p:cNvPr id="4" name="標題 3">
+            <a:extLst>
+              <a:ext uri="{FF2B5EF4-FFF2-40B4-BE49-F238E27FC236}">
+                <a16:creationId xmlns:a16="http://schemas.microsoft.com/office/drawing/2014/main" id="{CD6A41DD-B5E6-D530-EC0F-85726817D119}"/>
+              </a:ext>
+            </a:extLst>
+          </p:cNvPr>
           <p:cNvSpPr>
             <a:spLocks noGrp="1"/>
           </p:cNvSpPr>
@@ -3060,141 +3137,42 @@
             <p:ph type="title"/>
           </p:nvPr>
         </p:nvSpPr>
-        <p:spPr/>
+        <p:spPr>
+          <a:xfrm>
+            <a:off x="0" y="2660915"/>
+            <a:ext cx="12192000" cy="1143000"/>
+          </a:xfrm>
+        </p:spPr>
         <p:txBody>
           <a:bodyPr>
-            <a:normAutofit/>
+            <a:noAutofit/>
           </a:bodyPr>
           <a:lstStyle/>
           <a:p>
             <a:r>
-              <a:rPr lang="zh-CN" altLang="en-US" b="1" dirty="0">
-                <a:latin typeface="Microsoft JhengHei" pitchFamily="34" charset="-120"/>
-                <a:ea typeface="Microsoft JhengHei" pitchFamily="34" charset="-120"/>
+              <a:rPr lang="zh-TW" altLang="en-US" sz="7200" b="1" i="1" dirty="0">
+                <a:solidFill>
+                  <a:srgbClr val="000066"/>
+                </a:solidFill>
+                <a:effectLst>
+                  <a:outerShdw blurRad="38100" dist="38100" dir="2700000" algn="tl">
+                    <a:srgbClr val="000000">
+                      <a:alpha val="43137"/>
+                    </a:srgbClr>
+                  </a:outerShdw>
+                </a:effectLst>
+                <a:latin typeface="微軟正黑體" pitchFamily="34" charset="-120"/>
+                <a:ea typeface="微軟正黑體" pitchFamily="34" charset="-120"/>
               </a:rPr>
-              <a:t>千萬個理</a:t>
-            </a:r>
-            <a:r>
-              <a:rPr lang="zh-CN" altLang="en-US" b="1" dirty="0" smtClean="0">
-                <a:latin typeface="Microsoft JhengHei" pitchFamily="34" charset="-120"/>
-                <a:ea typeface="Microsoft JhengHei" pitchFamily="34" charset="-120"/>
-              </a:rPr>
-              <a:t>由</a:t>
-            </a:r>
-            <a:endParaRPr lang="en-US" b="1" dirty="0">
-              <a:latin typeface="Microsoft JhengHei" pitchFamily="34" charset="-120"/>
-              <a:ea typeface="Microsoft JhengHei" pitchFamily="34" charset="-120"/>
-            </a:endParaRPr>
-          </a:p>
-        </p:txBody>
-      </p:sp>
-      <p:sp>
-        <p:nvSpPr>
-          <p:cNvPr id="3" name="Content Placeholder 2"/>
-          <p:cNvSpPr>
-            <a:spLocks noGrp="1"/>
-          </p:cNvSpPr>
-          <p:nvPr>
-            <p:ph idx="1"/>
-          </p:nvPr>
-        </p:nvSpPr>
-        <p:spPr/>
-        <p:txBody>
-          <a:bodyPr>
-            <a:normAutofit/>
-          </a:bodyPr>
-          <a:lstStyle/>
-          <a:p>
-            <a:pPr marL="0" indent="0" algn="ctr">
-              <a:buNone/>
-            </a:pPr>
-            <a:r>
-              <a:rPr lang="zh-TW" altLang="en-US" sz="5400" b="1" dirty="0">
-                <a:latin typeface="Microsoft JhengHei" pitchFamily="34" charset="-120"/>
-                <a:ea typeface="Microsoft JhengHei" pitchFamily="34" charset="-120"/>
-              </a:rPr>
-              <a:t>頌讚主 我的靈 我的魂 </a:t>
-            </a:r>
-            <a:endParaRPr lang="en-US" altLang="zh-TW" sz="5400" b="1" dirty="0" smtClean="0">
-              <a:latin typeface="Microsoft JhengHei" pitchFamily="34" charset="-120"/>
-              <a:ea typeface="Microsoft JhengHei" pitchFamily="34" charset="-120"/>
-            </a:endParaRPr>
-          </a:p>
-          <a:p>
-            <a:pPr marL="0" indent="0" algn="ctr">
-              <a:buNone/>
-            </a:pPr>
-            <a:r>
-              <a:rPr lang="zh-TW" altLang="en-US" sz="5400" b="1" dirty="0" smtClean="0">
-                <a:latin typeface="Microsoft JhengHei" pitchFamily="34" charset="-120"/>
-                <a:ea typeface="Microsoft JhengHei" pitchFamily="34" charset="-120"/>
-              </a:rPr>
-              <a:t>尊</a:t>
-            </a:r>
-            <a:r>
-              <a:rPr lang="zh-TW" altLang="en-US" sz="5400" b="1" dirty="0">
-                <a:latin typeface="Microsoft JhengHei" pitchFamily="34" charset="-120"/>
-                <a:ea typeface="Microsoft JhengHei" pitchFamily="34" charset="-120"/>
-              </a:rPr>
-              <a:t>崇祂的聖名 </a:t>
-            </a:r>
-            <a:endParaRPr lang="en-US" altLang="zh-TW" sz="5400" b="1" dirty="0">
-              <a:latin typeface="Microsoft JhengHei" pitchFamily="34" charset="-120"/>
-              <a:ea typeface="Microsoft JhengHei" pitchFamily="34" charset="-120"/>
-            </a:endParaRPr>
-          </a:p>
-          <a:p>
-            <a:pPr marL="0" indent="0" algn="ctr">
-              <a:buNone/>
-            </a:pPr>
-            <a:r>
-              <a:rPr lang="zh-TW" altLang="en-US" sz="5400" b="1" dirty="0" smtClean="0">
-                <a:latin typeface="Microsoft JhengHei" pitchFamily="34" charset="-120"/>
-                <a:ea typeface="Microsoft JhengHei" pitchFamily="34" charset="-120"/>
-              </a:rPr>
-              <a:t>盡</a:t>
-            </a:r>
-            <a:r>
-              <a:rPr lang="zh-TW" altLang="en-US" sz="5400" b="1" dirty="0">
-                <a:latin typeface="Microsoft JhengHei" pitchFamily="34" charset="-120"/>
-                <a:ea typeface="Microsoft JhengHei" pitchFamily="34" charset="-120"/>
-              </a:rPr>
-              <a:t>全心和全力 歌頌你 </a:t>
-            </a:r>
-            <a:endParaRPr lang="en-US" altLang="zh-TW" sz="5400" b="1" dirty="0" smtClean="0">
-              <a:latin typeface="Microsoft JhengHei" pitchFamily="34" charset="-120"/>
-              <a:ea typeface="Microsoft JhengHei" pitchFamily="34" charset="-120"/>
-            </a:endParaRPr>
-          </a:p>
-          <a:p>
-            <a:pPr marL="0" indent="0" algn="ctr">
-              <a:buNone/>
-            </a:pPr>
-            <a:r>
-              <a:rPr lang="zh-TW" altLang="en-US" sz="5400" b="1" dirty="0" smtClean="0">
-                <a:latin typeface="Microsoft JhengHei" pitchFamily="34" charset="-120"/>
-                <a:ea typeface="Microsoft JhengHei" pitchFamily="34" charset="-120"/>
-              </a:rPr>
-              <a:t>我</a:t>
-            </a:r>
-            <a:r>
-              <a:rPr lang="zh-TW" altLang="en-US" sz="5400" b="1" dirty="0">
-                <a:latin typeface="Microsoft JhengHei" pitchFamily="34" charset="-120"/>
-                <a:ea typeface="Microsoft JhengHei" pitchFamily="34" charset="-120"/>
-              </a:rPr>
-              <a:t>尊崇你的聖名</a:t>
-            </a:r>
-            <a:endParaRPr lang="en-US" sz="5400" b="1" dirty="0">
-              <a:latin typeface="Microsoft JhengHei" pitchFamily="34" charset="-120"/>
-              <a:ea typeface="Microsoft JhengHei" pitchFamily="34" charset="-120"/>
-            </a:endParaRPr>
+              <a:t>千萬個理由</a:t>
+            </a:r>
           </a:p>
         </p:txBody>
       </p:sp>
     </p:spTree>
     <p:extLst>
       <p:ext uri="{BB962C8B-B14F-4D97-AF65-F5344CB8AC3E}">
-        <p14:creationId xmlns:p14="http://schemas.microsoft.com/office/powerpoint/2010/main" val="4226634755"/>
+        <p14:creationId xmlns:p14="http://schemas.microsoft.com/office/powerpoint/2010/main" val="388492399"/>
       </p:ext>
     </p:extLst>
   </p:cSld>
@@ -3209,7 +3187,13 @@
   <p:cSld>
     <p:spTree>
       <p:nvGrpSpPr>
-        <p:cNvPr id="1" name=""/>
+        <p:cNvPr id="1" name="">
+          <a:extLst>
+            <a:ext uri="{FF2B5EF4-FFF2-40B4-BE49-F238E27FC236}">
+              <a16:creationId xmlns:a16="http://schemas.microsoft.com/office/drawing/2014/main" id="{499F6A04-361B-D03C-72FC-83746A3861FC}"/>
+            </a:ext>
+          </a:extLst>
+        </p:cNvPr>
         <p:cNvGrpSpPr/>
         <p:nvPr/>
       </p:nvGrpSpPr>
@@ -3223,141 +3207,137 @@
       </p:grpSpPr>
       <p:sp>
         <p:nvSpPr>
-          <p:cNvPr id="2" name="Title 1"/>
-          <p:cNvSpPr>
-            <a:spLocks noGrp="1"/>
-          </p:cNvSpPr>
-          <p:nvPr>
-            <p:ph type="title"/>
-          </p:nvPr>
-        </p:nvSpPr>
-        <p:spPr/>
-        <p:txBody>
-          <a:bodyPr>
+          <p:cNvPr id="5" name="內容版面配置區 4">
+            <a:extLst>
+              <a:ext uri="{FF2B5EF4-FFF2-40B4-BE49-F238E27FC236}">
+                <a16:creationId xmlns:a16="http://schemas.microsoft.com/office/drawing/2014/main" id="{EE77592B-EE8B-614D-4160-CDFC7BCE80DB}"/>
+              </a:ext>
+            </a:extLst>
+          </p:cNvPr>
+          <p:cNvSpPr>
+            <a:spLocks noGrp="1"/>
+          </p:cNvSpPr>
+          <p:nvPr>
+            <p:ph idx="1"/>
+          </p:nvPr>
+        </p:nvSpPr>
+        <p:spPr>
+          <a:xfrm>
+            <a:off x="0" y="2084851"/>
+            <a:ext cx="12192000" cy="2404863"/>
+          </a:xfrm>
+        </p:spPr>
+        <p:txBody>
+          <a:bodyPr anchor="ctr">
             <a:normAutofit/>
           </a:bodyPr>
           <a:lstStyle/>
           <a:p>
-            <a:r>
-              <a:rPr lang="zh-CN" altLang="en-US" b="1" dirty="0">
-                <a:latin typeface="Microsoft JhengHei" pitchFamily="34" charset="-120"/>
-                <a:ea typeface="Microsoft JhengHei" pitchFamily="34" charset="-120"/>
+            <a:pPr algn="ctr">
+              <a:buNone/>
+            </a:pPr>
+            <a:r>
+              <a:rPr lang="zh-TW" altLang="en-US" sz="6400" b="1" dirty="0">
+                <a:solidFill>
+                  <a:srgbClr val="000066"/>
+                </a:solidFill>
+                <a:latin typeface="微軟正黑體" pitchFamily="34" charset="-120"/>
+                <a:ea typeface="微軟正黑體" pitchFamily="34" charset="-120"/>
               </a:rPr>
-              <a:t>千萬個理</a:t>
-            </a:r>
-            <a:r>
-              <a:rPr lang="zh-CN" altLang="en-US" b="1" dirty="0" smtClean="0">
-                <a:latin typeface="Microsoft JhengHei" pitchFamily="34" charset="-120"/>
-                <a:ea typeface="Microsoft JhengHei" pitchFamily="34" charset="-120"/>
+              <a:t>太陽升起  新的一天來臨 </a:t>
+            </a:r>
+          </a:p>
+          <a:p>
+            <a:pPr algn="ctr">
+              <a:buNone/>
+            </a:pPr>
+            <a:r>
+              <a:rPr lang="zh-TW" altLang="en-US" sz="6400" b="1" dirty="0">
+                <a:solidFill>
+                  <a:srgbClr val="000066"/>
+                </a:solidFill>
+                <a:latin typeface="微軟正黑體" pitchFamily="34" charset="-120"/>
+                <a:ea typeface="微軟正黑體" pitchFamily="34" charset="-120"/>
               </a:rPr>
-              <a:t>由</a:t>
-            </a:r>
-            <a:endParaRPr lang="en-US" b="1" dirty="0">
-              <a:latin typeface="Microsoft JhengHei" pitchFamily="34" charset="-120"/>
-              <a:ea typeface="Microsoft JhengHei" pitchFamily="34" charset="-120"/>
-            </a:endParaRPr>
-          </a:p>
-        </p:txBody>
-      </p:sp>
-      <p:sp>
-        <p:nvSpPr>
-          <p:cNvPr id="3" name="Content Placeholder 2"/>
-          <p:cNvSpPr>
-            <a:spLocks noGrp="1"/>
-          </p:cNvSpPr>
-          <p:nvPr>
-            <p:ph idx="1"/>
-          </p:nvPr>
+              <a:t>就是要再來歌頌我神 </a:t>
+            </a:r>
+          </a:p>
+        </p:txBody>
+      </p:sp>
+      <p:sp>
+        <p:nvSpPr>
+          <p:cNvPr id="3" name="TextBox 2">
+            <a:extLst>
+              <a:ext uri="{FF2B5EF4-FFF2-40B4-BE49-F238E27FC236}">
+                <a16:creationId xmlns:a16="http://schemas.microsoft.com/office/drawing/2014/main" id="{FA175DD0-F211-14DE-420F-4A50F79B6BD2}"/>
+              </a:ext>
+            </a:extLst>
+          </p:cNvPr>
+          <p:cNvSpPr txBox="1"/>
+          <p:nvPr/>
         </p:nvSpPr>
         <p:spPr>
           <a:xfrm>
-            <a:off x="0" y="1600200"/>
-            <a:ext cx="9144000" cy="5029200"/>
+            <a:off x="0" y="5362145"/>
+            <a:ext cx="12192000" cy="584775"/>
           </a:xfrm>
+          <a:prstGeom prst="rect">
+            <a:avLst/>
+          </a:prstGeom>
+          <a:noFill/>
         </p:spPr>
         <p:txBody>
-          <a:bodyPr>
-            <a:normAutofit/>
+          <a:bodyPr wrap="square" rtlCol="0">
+            <a:spAutoFit/>
           </a:bodyPr>
           <a:lstStyle/>
           <a:p>
-            <a:pPr marL="0" indent="0" algn="ctr">
-              <a:buNone/>
-            </a:pPr>
-            <a:r>
-              <a:rPr lang="zh-TW" altLang="en-US" sz="5400" b="1" dirty="0">
-                <a:latin typeface="Microsoft JhengHei" pitchFamily="34" charset="-120"/>
-                <a:ea typeface="Microsoft JhengHei" pitchFamily="34" charset="-120"/>
+            <a:pPr algn="ctr"/>
+            <a:r>
+              <a:rPr lang="en-US" sz="3200" b="1" dirty="0">
+                <a:solidFill>
+                  <a:srgbClr val="000066"/>
+                </a:solidFill>
+                <a:latin typeface="Microsoft JhengHei" panose="020B0604030504040204" pitchFamily="34" charset="-120"/>
+                <a:ea typeface="Microsoft JhengHei" panose="020B0604030504040204" pitchFamily="34" charset="-120"/>
               </a:rPr>
-              <a:t>太陽升起 新的一天來臨 </a:t>
-            </a:r>
-            <a:endParaRPr lang="en-US" altLang="zh-TW" sz="5400" b="1" dirty="0">
-              <a:latin typeface="Microsoft JhengHei" pitchFamily="34" charset="-120"/>
-              <a:ea typeface="Microsoft JhengHei" pitchFamily="34" charset="-120"/>
-            </a:endParaRPr>
-          </a:p>
-          <a:p>
-            <a:pPr marL="0" indent="0" algn="ctr">
-              <a:buNone/>
-            </a:pPr>
-            <a:r>
-              <a:rPr lang="zh-TW" altLang="en-US" sz="5400" b="1" dirty="0">
-                <a:latin typeface="Microsoft JhengHei" pitchFamily="34" charset="-120"/>
-                <a:ea typeface="Microsoft JhengHei" pitchFamily="34" charset="-120"/>
+              <a:t>( </a:t>
+            </a:r>
+            <a:r>
+              <a:rPr lang="zh-CN" altLang="en-US" sz="3200" b="1" dirty="0">
+                <a:solidFill>
+                  <a:srgbClr val="000066"/>
+                </a:solidFill>
+                <a:latin typeface="Microsoft JhengHei" panose="020B0604030504040204" pitchFamily="34" charset="-120"/>
+                <a:ea typeface="Microsoft JhengHei" panose="020B0604030504040204" pitchFamily="34" charset="-120"/>
               </a:rPr>
-              <a:t>就是要再來歌頌我神 </a:t>
-            </a:r>
-            <a:endParaRPr lang="en-US" altLang="zh-TW" sz="5400" b="1" dirty="0">
-              <a:latin typeface="Microsoft JhengHei" pitchFamily="34" charset="-120"/>
-              <a:ea typeface="Microsoft JhengHei" pitchFamily="34" charset="-120"/>
-            </a:endParaRPr>
-          </a:p>
-          <a:p>
-            <a:pPr marL="0" indent="0" algn="ctr">
-              <a:buNone/>
-            </a:pPr>
-            <a:r>
-              <a:rPr lang="zh-TW" altLang="en-US" sz="5400" b="1" dirty="0">
-                <a:latin typeface="Microsoft JhengHei" pitchFamily="34" charset="-120"/>
-                <a:ea typeface="Microsoft JhengHei" pitchFamily="34" charset="-120"/>
+              <a:t>正歌 </a:t>
+            </a:r>
+            <a:r>
+              <a:rPr lang="en-US" altLang="zh-CN" sz="3200" b="1" dirty="0">
+                <a:solidFill>
+                  <a:srgbClr val="000066"/>
+                </a:solidFill>
+                <a:latin typeface="Microsoft JhengHei" panose="020B0604030504040204" pitchFamily="34" charset="-120"/>
+                <a:ea typeface="Microsoft JhengHei" panose="020B0604030504040204" pitchFamily="34" charset="-120"/>
               </a:rPr>
-              <a:t>無論將要面對是 </a:t>
-            </a:r>
-            <a:endParaRPr lang="en-US" altLang="zh-TW" sz="5400" b="1" dirty="0">
-              <a:latin typeface="Microsoft JhengHei" pitchFamily="34" charset="-120"/>
-              <a:ea typeface="Microsoft JhengHei" pitchFamily="34" charset="-120"/>
-            </a:endParaRPr>
-          </a:p>
-          <a:p>
-            <a:pPr marL="0" indent="0" algn="ctr">
-              <a:buNone/>
-            </a:pPr>
-            <a:r>
-              <a:rPr lang="zh-TW" altLang="en-US" sz="5400" b="1" dirty="0">
-                <a:latin typeface="Microsoft JhengHei" pitchFamily="34" charset="-120"/>
-                <a:ea typeface="Microsoft JhengHei" pitchFamily="34" charset="-120"/>
+              <a:t>1</a:t>
+            </a:r>
+            <a:r>
+              <a:rPr lang="en-US" sz="3200" b="1" dirty="0">
+                <a:solidFill>
+                  <a:srgbClr val="000066"/>
+                </a:solidFill>
+                <a:latin typeface="Microsoft JhengHei" panose="020B0604030504040204" pitchFamily="34" charset="-120"/>
+                <a:ea typeface="Microsoft JhengHei" panose="020B0604030504040204" pitchFamily="34" charset="-120"/>
               </a:rPr>
-              <a:t>順境或是逆境 </a:t>
-            </a:r>
-            <a:endParaRPr lang="en-US" altLang="zh-TW" sz="5400" b="1" dirty="0">
-              <a:latin typeface="Microsoft JhengHei" pitchFamily="34" charset="-120"/>
-              <a:ea typeface="Microsoft JhengHei" pitchFamily="34" charset="-120"/>
-            </a:endParaRPr>
-          </a:p>
-          <a:p>
-            <a:pPr marL="0" indent="0" algn="ctr">
-              <a:buNone/>
-            </a:pPr>
-            <a:r>
-              <a:rPr lang="zh-TW" altLang="en-US" sz="5400" b="1" dirty="0">
-                <a:latin typeface="Microsoft JhengHei" pitchFamily="34" charset="-120"/>
-                <a:ea typeface="Microsoft JhengHei" pitchFamily="34" charset="-120"/>
-              </a:rPr>
-              <a:t>當夜晚來臨仍要歌頌你 </a:t>
-            </a:r>
-            <a:endParaRPr lang="en-US" sz="5400" b="1" dirty="0">
-              <a:latin typeface="Microsoft JhengHei" pitchFamily="34" charset="-120"/>
-              <a:ea typeface="Microsoft JhengHei" pitchFamily="34" charset="-120"/>
+              <a:t> )</a:t>
+            </a:r>
+            <a:endParaRPr lang="vi-VN" sz="3200" b="1" dirty="0">
+              <a:solidFill>
+                <a:srgbClr val="000066"/>
+              </a:solidFill>
+              <a:ea typeface="Microsoft JhengHei" panose="020B0604030504040204" pitchFamily="34" charset="-120"/>
             </a:endParaRPr>
           </a:p>
         </p:txBody>
@@ -3365,7 +3345,7 @@
     </p:spTree>
     <p:extLst>
       <p:ext uri="{BB962C8B-B14F-4D97-AF65-F5344CB8AC3E}">
-        <p14:creationId xmlns:p14="http://schemas.microsoft.com/office/powerpoint/2010/main" val="3943454604"/>
+        <p14:creationId xmlns:p14="http://schemas.microsoft.com/office/powerpoint/2010/main" val="3885075056"/>
       </p:ext>
     </p:extLst>
   </p:cSld>
@@ -3380,7 +3360,13 @@
   <p:cSld>
     <p:spTree>
       <p:nvGrpSpPr>
-        <p:cNvPr id="1" name=""/>
+        <p:cNvPr id="1" name="">
+          <a:extLst>
+            <a:ext uri="{FF2B5EF4-FFF2-40B4-BE49-F238E27FC236}">
+              <a16:creationId xmlns:a16="http://schemas.microsoft.com/office/drawing/2014/main" id="{6B6A9BD1-0549-F401-40D2-7F0322E0E76D}"/>
+            </a:ext>
+          </a:extLst>
+        </p:cNvPr>
         <p:cNvGrpSpPr/>
         <p:nvPr/>
       </p:nvGrpSpPr>
@@ -3394,141 +3380,144 @@
       </p:grpSpPr>
       <p:sp>
         <p:nvSpPr>
-          <p:cNvPr id="2" name="Title 1"/>
-          <p:cNvSpPr>
-            <a:spLocks noGrp="1"/>
-          </p:cNvSpPr>
-          <p:nvPr>
-            <p:ph type="title"/>
-          </p:nvPr>
-        </p:nvSpPr>
-        <p:spPr/>
-        <p:txBody>
-          <a:bodyPr>
+          <p:cNvPr id="5" name="內容版面配置區 4">
+            <a:extLst>
+              <a:ext uri="{FF2B5EF4-FFF2-40B4-BE49-F238E27FC236}">
+                <a16:creationId xmlns:a16="http://schemas.microsoft.com/office/drawing/2014/main" id="{8629C204-2511-9E97-8FF1-3ADFF3B0C155}"/>
+              </a:ext>
+            </a:extLst>
+          </p:cNvPr>
+          <p:cNvSpPr>
+            <a:spLocks noGrp="1"/>
+          </p:cNvSpPr>
+          <p:nvPr>
+            <p:ph idx="1"/>
+          </p:nvPr>
+        </p:nvSpPr>
+        <p:spPr>
+          <a:xfrm>
+            <a:off x="0" y="2084851"/>
+            <a:ext cx="12192000" cy="2404863"/>
+          </a:xfrm>
+        </p:spPr>
+        <p:txBody>
+          <a:bodyPr anchor="ctr">
             <a:normAutofit/>
           </a:bodyPr>
           <a:lstStyle/>
           <a:p>
-            <a:r>
-              <a:rPr lang="zh-CN" altLang="en-US" b="1" dirty="0">
-                <a:latin typeface="Microsoft JhengHei" pitchFamily="34" charset="-120"/>
-                <a:ea typeface="Microsoft JhengHei" pitchFamily="34" charset="-120"/>
+            <a:pPr algn="ctr">
+              <a:buNone/>
+            </a:pPr>
+            <a:r>
+              <a:rPr lang="zh-TW" altLang="en-US" sz="6400" b="1" dirty="0">
+                <a:solidFill>
+                  <a:srgbClr val="000066"/>
+                </a:solidFill>
+                <a:latin typeface="微軟正黑體" pitchFamily="34" charset="-120"/>
+                <a:ea typeface="微軟正黑體" pitchFamily="34" charset="-120"/>
               </a:rPr>
-              <a:t>千萬個理</a:t>
-            </a:r>
-            <a:r>
-              <a:rPr lang="zh-CN" altLang="en-US" b="1" dirty="0" smtClean="0">
-                <a:latin typeface="Microsoft JhengHei" pitchFamily="34" charset="-120"/>
-                <a:ea typeface="Microsoft JhengHei" pitchFamily="34" charset="-120"/>
+              <a:t>無論將要面對是  順境或是逆境</a:t>
+            </a:r>
+            <a:endParaRPr lang="en-US" altLang="zh-TW" sz="6400" b="1" dirty="0">
+              <a:solidFill>
+                <a:srgbClr val="000066"/>
+              </a:solidFill>
+              <a:latin typeface="微軟正黑體" pitchFamily="34" charset="-120"/>
+              <a:ea typeface="微軟正黑體" pitchFamily="34" charset="-120"/>
+            </a:endParaRPr>
+          </a:p>
+          <a:p>
+            <a:pPr algn="ctr">
+              <a:buNone/>
+            </a:pPr>
+            <a:r>
+              <a:rPr lang="zh-TW" altLang="en-US" sz="6400" b="1" dirty="0">
+                <a:solidFill>
+                  <a:srgbClr val="000066"/>
+                </a:solidFill>
+                <a:latin typeface="微軟正黑體" pitchFamily="34" charset="-120"/>
+                <a:ea typeface="微軟正黑體" pitchFamily="34" charset="-120"/>
               </a:rPr>
-              <a:t>由</a:t>
-            </a:r>
-            <a:endParaRPr lang="en-US" b="1" dirty="0">
-              <a:latin typeface="Microsoft JhengHei" pitchFamily="34" charset="-120"/>
-              <a:ea typeface="Microsoft JhengHei" pitchFamily="34" charset="-120"/>
-            </a:endParaRPr>
-          </a:p>
-        </p:txBody>
-      </p:sp>
-      <p:sp>
-        <p:nvSpPr>
-          <p:cNvPr id="3" name="Content Placeholder 2"/>
-          <p:cNvSpPr>
-            <a:spLocks noGrp="1"/>
-          </p:cNvSpPr>
-          <p:nvPr>
-            <p:ph idx="1"/>
-          </p:nvPr>
-        </p:nvSpPr>
-        <p:spPr/>
-        <p:txBody>
-          <a:bodyPr>
-            <a:normAutofit/>
+              <a:t>當夜晚來臨仍要歌頌祢 </a:t>
+            </a:r>
+          </a:p>
+        </p:txBody>
+      </p:sp>
+      <p:sp>
+        <p:nvSpPr>
+          <p:cNvPr id="3" name="TextBox 2">
+            <a:extLst>
+              <a:ext uri="{FF2B5EF4-FFF2-40B4-BE49-F238E27FC236}">
+                <a16:creationId xmlns:a16="http://schemas.microsoft.com/office/drawing/2014/main" id="{EDE32727-7178-1286-838F-3EFBC44FDC21}"/>
+              </a:ext>
+            </a:extLst>
+          </p:cNvPr>
+          <p:cNvSpPr txBox="1"/>
+          <p:nvPr/>
+        </p:nvSpPr>
+        <p:spPr>
+          <a:xfrm>
+            <a:off x="0" y="5362145"/>
+            <a:ext cx="12192000" cy="584775"/>
+          </a:xfrm>
+          <a:prstGeom prst="rect">
+            <a:avLst/>
+          </a:prstGeom>
+          <a:noFill/>
+        </p:spPr>
+        <p:txBody>
+          <a:bodyPr wrap="square" rtlCol="0">
+            <a:spAutoFit/>
           </a:bodyPr>
           <a:lstStyle/>
           <a:p>
-            <a:pPr marL="0" indent="0" algn="ctr">
-              <a:buNone/>
-            </a:pPr>
-            <a:r>
-              <a:rPr lang="zh-TW" altLang="en-US" sz="5400" b="1" dirty="0">
-                <a:latin typeface="Microsoft JhengHei" pitchFamily="34" charset="-120"/>
-                <a:ea typeface="Microsoft JhengHei" pitchFamily="34" charset="-120"/>
+            <a:pPr algn="ctr"/>
+            <a:r>
+              <a:rPr lang="en-US" sz="3200" b="1" dirty="0">
+                <a:solidFill>
+                  <a:srgbClr val="000066"/>
+                </a:solidFill>
+                <a:latin typeface="Microsoft JhengHei" panose="020B0604030504040204" pitchFamily="34" charset="-120"/>
+                <a:ea typeface="Microsoft JhengHei" panose="020B0604030504040204" pitchFamily="34" charset="-120"/>
               </a:rPr>
-              <a:t>頌讚主 我的靈 我的魂 </a:t>
-            </a:r>
-            <a:endParaRPr lang="en-US" altLang="zh-TW" sz="5400" b="1" dirty="0" smtClean="0">
-              <a:latin typeface="Microsoft JhengHei" pitchFamily="34" charset="-120"/>
-              <a:ea typeface="Microsoft JhengHei" pitchFamily="34" charset="-120"/>
-            </a:endParaRPr>
-          </a:p>
-          <a:p>
-            <a:pPr marL="0" indent="0" algn="ctr">
-              <a:buNone/>
-            </a:pPr>
-            <a:r>
-              <a:rPr lang="zh-TW" altLang="en-US" sz="5400" b="1" dirty="0" smtClean="0">
-                <a:latin typeface="Microsoft JhengHei" pitchFamily="34" charset="-120"/>
-                <a:ea typeface="Microsoft JhengHei" pitchFamily="34" charset="-120"/>
+              <a:t>( </a:t>
+            </a:r>
+            <a:r>
+              <a:rPr lang="zh-CN" altLang="en-US" sz="3200" b="1" dirty="0">
+                <a:solidFill>
+                  <a:srgbClr val="000066"/>
+                </a:solidFill>
+                <a:latin typeface="Microsoft JhengHei" panose="020B0604030504040204" pitchFamily="34" charset="-120"/>
+                <a:ea typeface="Microsoft JhengHei" panose="020B0604030504040204" pitchFamily="34" charset="-120"/>
               </a:rPr>
-              <a:t>尊</a:t>
-            </a:r>
-            <a:r>
-              <a:rPr lang="zh-TW" altLang="en-US" sz="5400" b="1" dirty="0">
-                <a:latin typeface="Microsoft JhengHei" pitchFamily="34" charset="-120"/>
-                <a:ea typeface="Microsoft JhengHei" pitchFamily="34" charset="-120"/>
+              <a:t>正歌 </a:t>
+            </a:r>
+            <a:r>
+              <a:rPr lang="en-US" altLang="zh-CN" sz="3200" b="1" dirty="0">
+                <a:solidFill>
+                  <a:srgbClr val="000066"/>
+                </a:solidFill>
+                <a:latin typeface="Microsoft JhengHei" panose="020B0604030504040204" pitchFamily="34" charset="-120"/>
+                <a:ea typeface="Microsoft JhengHei" panose="020B0604030504040204" pitchFamily="34" charset="-120"/>
               </a:rPr>
-              <a:t>崇祂的聖名 </a:t>
-            </a:r>
-            <a:endParaRPr lang="en-US" altLang="zh-TW" sz="5400" b="1" dirty="0">
-              <a:latin typeface="Microsoft JhengHei" pitchFamily="34" charset="-120"/>
-              <a:ea typeface="Microsoft JhengHei" pitchFamily="34" charset="-120"/>
-            </a:endParaRPr>
-          </a:p>
-          <a:p>
-            <a:pPr marL="0" indent="0" algn="ctr">
-              <a:buNone/>
-            </a:pPr>
-            <a:r>
-              <a:rPr lang="zh-TW" altLang="en-US" sz="5400" b="1" dirty="0" smtClean="0">
-                <a:latin typeface="Microsoft JhengHei" pitchFamily="34" charset="-120"/>
-                <a:ea typeface="Microsoft JhengHei" pitchFamily="34" charset="-120"/>
+              <a:t>1</a:t>
+            </a:r>
+            <a:r>
+              <a:rPr lang="en-US" sz="3200" b="1" dirty="0">
+                <a:solidFill>
+                  <a:srgbClr val="000066"/>
+                </a:solidFill>
+                <a:latin typeface="Microsoft JhengHei" panose="020B0604030504040204" pitchFamily="34" charset="-120"/>
+                <a:ea typeface="Microsoft JhengHei" panose="020B0604030504040204" pitchFamily="34" charset="-120"/>
               </a:rPr>
-              <a:t>盡</a:t>
-            </a:r>
-            <a:r>
-              <a:rPr lang="zh-TW" altLang="en-US" sz="5400" b="1" dirty="0">
-                <a:latin typeface="Microsoft JhengHei" pitchFamily="34" charset="-120"/>
-                <a:ea typeface="Microsoft JhengHei" pitchFamily="34" charset="-120"/>
-              </a:rPr>
-              <a:t>全心和全力 歌頌你 </a:t>
-            </a:r>
-            <a:endParaRPr lang="en-US" altLang="zh-TW" sz="5400" b="1" dirty="0" smtClean="0">
-              <a:latin typeface="Microsoft JhengHei" pitchFamily="34" charset="-120"/>
-              <a:ea typeface="Microsoft JhengHei" pitchFamily="34" charset="-120"/>
-            </a:endParaRPr>
-          </a:p>
-          <a:p>
-            <a:pPr marL="0" indent="0" algn="ctr">
-              <a:buNone/>
-            </a:pPr>
-            <a:r>
-              <a:rPr lang="zh-TW" altLang="en-US" sz="5400" b="1" dirty="0" smtClean="0">
-                <a:latin typeface="Microsoft JhengHei" pitchFamily="34" charset="-120"/>
-                <a:ea typeface="Microsoft JhengHei" pitchFamily="34" charset="-120"/>
-              </a:rPr>
-              <a:t>我</a:t>
-            </a:r>
-            <a:r>
-              <a:rPr lang="zh-TW" altLang="en-US" sz="5400" b="1" dirty="0">
-                <a:latin typeface="Microsoft JhengHei" pitchFamily="34" charset="-120"/>
-                <a:ea typeface="Microsoft JhengHei" pitchFamily="34" charset="-120"/>
-              </a:rPr>
-              <a:t>尊崇你的聖名</a:t>
-            </a:r>
-            <a:endParaRPr lang="en-US" sz="5400" b="1" dirty="0">
-              <a:latin typeface="Microsoft JhengHei" pitchFamily="34" charset="-120"/>
-              <a:ea typeface="Microsoft JhengHei" pitchFamily="34" charset="-120"/>
+              <a:t> )</a:t>
+            </a:r>
+            <a:endParaRPr lang="vi-VN" sz="3200" b="1" dirty="0">
+              <a:solidFill>
+                <a:srgbClr val="000066"/>
+              </a:solidFill>
+              <a:ea typeface="Microsoft JhengHei" panose="020B0604030504040204" pitchFamily="34" charset="-120"/>
             </a:endParaRPr>
           </a:p>
         </p:txBody>
@@ -3536,7 +3525,7 @@
     </p:spTree>
     <p:extLst>
       <p:ext uri="{BB962C8B-B14F-4D97-AF65-F5344CB8AC3E}">
-        <p14:creationId xmlns:p14="http://schemas.microsoft.com/office/powerpoint/2010/main" val="3469086838"/>
+        <p14:creationId xmlns:p14="http://schemas.microsoft.com/office/powerpoint/2010/main" val="1946294677"/>
       </p:ext>
     </p:extLst>
   </p:cSld>
@@ -3551,7 +3540,13 @@
   <p:cSld>
     <p:spTree>
       <p:nvGrpSpPr>
-        <p:cNvPr id="1" name=""/>
+        <p:cNvPr id="1" name="">
+          <a:extLst>
+            <a:ext uri="{FF2B5EF4-FFF2-40B4-BE49-F238E27FC236}">
+              <a16:creationId xmlns:a16="http://schemas.microsoft.com/office/drawing/2014/main" id="{BAE56C30-F38E-4CBC-441C-7DDDAF394623}"/>
+            </a:ext>
+          </a:extLst>
+        </p:cNvPr>
         <p:cNvGrpSpPr/>
         <p:nvPr/>
       </p:nvGrpSpPr>
@@ -3565,141 +3560,127 @@
       </p:grpSpPr>
       <p:sp>
         <p:nvSpPr>
-          <p:cNvPr id="2" name="Title 1"/>
-          <p:cNvSpPr>
-            <a:spLocks noGrp="1"/>
-          </p:cNvSpPr>
-          <p:nvPr>
-            <p:ph type="title"/>
-          </p:nvPr>
-        </p:nvSpPr>
-        <p:spPr/>
-        <p:txBody>
-          <a:bodyPr>
+          <p:cNvPr id="5" name="內容版面配置區 4">
+            <a:extLst>
+              <a:ext uri="{FF2B5EF4-FFF2-40B4-BE49-F238E27FC236}">
+                <a16:creationId xmlns:a16="http://schemas.microsoft.com/office/drawing/2014/main" id="{5856A434-20CA-7A10-EF15-C2A4AE3B49E6}"/>
+              </a:ext>
+            </a:extLst>
+          </p:cNvPr>
+          <p:cNvSpPr>
+            <a:spLocks noGrp="1"/>
+          </p:cNvSpPr>
+          <p:nvPr>
+            <p:ph idx="1"/>
+          </p:nvPr>
+        </p:nvSpPr>
+        <p:spPr>
+          <a:xfrm>
+            <a:off x="0" y="2084851"/>
+            <a:ext cx="12192000" cy="2404863"/>
+          </a:xfrm>
+        </p:spPr>
+        <p:txBody>
+          <a:bodyPr anchor="ctr">
             <a:normAutofit/>
           </a:bodyPr>
           <a:lstStyle/>
           <a:p>
-            <a:r>
-              <a:rPr lang="zh-CN" altLang="en-US" b="1" dirty="0">
-                <a:latin typeface="Microsoft JhengHei" pitchFamily="34" charset="-120"/>
-                <a:ea typeface="Microsoft JhengHei" pitchFamily="34" charset="-120"/>
+            <a:pPr algn="ctr">
+              <a:buNone/>
+            </a:pPr>
+            <a:r>
+              <a:rPr lang="zh-TW" altLang="en-US" sz="6400" b="1" dirty="0">
+                <a:solidFill>
+                  <a:srgbClr val="000066"/>
+                </a:solidFill>
+                <a:latin typeface="微軟正黑體" pitchFamily="34" charset="-120"/>
+                <a:ea typeface="微軟正黑體" pitchFamily="34" charset="-120"/>
               </a:rPr>
-              <a:t>千萬個理</a:t>
-            </a:r>
-            <a:r>
-              <a:rPr lang="zh-CN" altLang="en-US" b="1" dirty="0" smtClean="0">
-                <a:latin typeface="Microsoft JhengHei" pitchFamily="34" charset="-120"/>
-                <a:ea typeface="Microsoft JhengHei" pitchFamily="34" charset="-120"/>
+              <a:t>頌讚主  我的靈  我的魂 </a:t>
+            </a:r>
+          </a:p>
+          <a:p>
+            <a:pPr algn="ctr">
+              <a:buNone/>
+            </a:pPr>
+            <a:r>
+              <a:rPr lang="zh-TW" altLang="en-US" sz="6400" b="1" dirty="0">
+                <a:solidFill>
+                  <a:srgbClr val="000066"/>
+                </a:solidFill>
+                <a:latin typeface="微軟正黑體" pitchFamily="34" charset="-120"/>
+                <a:ea typeface="微軟正黑體" pitchFamily="34" charset="-120"/>
               </a:rPr>
-              <a:t>由</a:t>
-            </a:r>
-            <a:endParaRPr lang="en-US" b="1" dirty="0">
-              <a:latin typeface="Microsoft JhengHei" pitchFamily="34" charset="-120"/>
-              <a:ea typeface="Microsoft JhengHei" pitchFamily="34" charset="-120"/>
-            </a:endParaRPr>
-          </a:p>
-        </p:txBody>
-      </p:sp>
-      <p:sp>
-        <p:nvSpPr>
-          <p:cNvPr id="3" name="Content Placeholder 2"/>
-          <p:cNvSpPr>
-            <a:spLocks noGrp="1"/>
-          </p:cNvSpPr>
-          <p:nvPr>
-            <p:ph idx="1"/>
-          </p:nvPr>
+              <a:t>尊崇祂的聖名 </a:t>
+            </a:r>
+          </a:p>
+        </p:txBody>
+      </p:sp>
+      <p:sp>
+        <p:nvSpPr>
+          <p:cNvPr id="3" name="TextBox 2">
+            <a:extLst>
+              <a:ext uri="{FF2B5EF4-FFF2-40B4-BE49-F238E27FC236}">
+                <a16:creationId xmlns:a16="http://schemas.microsoft.com/office/drawing/2014/main" id="{324545BE-9D21-151D-A471-D58794FE4AD7}"/>
+              </a:ext>
+            </a:extLst>
+          </p:cNvPr>
+          <p:cNvSpPr txBox="1"/>
+          <p:nvPr/>
         </p:nvSpPr>
         <p:spPr>
           <a:xfrm>
-            <a:off x="0" y="1600200"/>
-            <a:ext cx="9144000" cy="5029200"/>
+            <a:off x="0" y="5362145"/>
+            <a:ext cx="12192000" cy="584775"/>
           </a:xfrm>
+          <a:prstGeom prst="rect">
+            <a:avLst/>
+          </a:prstGeom>
+          <a:noFill/>
         </p:spPr>
         <p:txBody>
-          <a:bodyPr>
-            <a:normAutofit/>
+          <a:bodyPr wrap="square" rtlCol="0">
+            <a:spAutoFit/>
           </a:bodyPr>
           <a:lstStyle/>
           <a:p>
-            <a:pPr marL="0" indent="0" algn="ctr">
-              <a:buNone/>
-            </a:pPr>
-            <a:r>
-              <a:rPr lang="zh-TW" altLang="en-US" sz="5400" b="1" dirty="0">
-                <a:latin typeface="Microsoft JhengHei" pitchFamily="34" charset="-120"/>
-                <a:ea typeface="Microsoft JhengHei" pitchFamily="34" charset="-120"/>
+            <a:pPr algn="ctr"/>
+            <a:r>
+              <a:rPr lang="en-US" sz="3200" b="1" dirty="0">
+                <a:solidFill>
+                  <a:srgbClr val="000066"/>
+                </a:solidFill>
+                <a:latin typeface="Microsoft JhengHei" panose="020B0604030504040204" pitchFamily="34" charset="-120"/>
+                <a:ea typeface="Microsoft JhengHei" panose="020B0604030504040204" pitchFamily="34" charset="-120"/>
               </a:rPr>
-              <a:t>豐盛慈愛且不輕易發怒 </a:t>
-            </a:r>
-            <a:endParaRPr lang="en-US" altLang="zh-TW" sz="5400" b="1" dirty="0">
-              <a:latin typeface="Microsoft JhengHei" pitchFamily="34" charset="-120"/>
-              <a:ea typeface="Microsoft JhengHei" pitchFamily="34" charset="-120"/>
-            </a:endParaRPr>
-          </a:p>
-          <a:p>
-            <a:pPr marL="0" indent="0" algn="ctr">
-              <a:buNone/>
-            </a:pPr>
-            <a:r>
-              <a:rPr lang="zh-TW" altLang="en-US" sz="5400" b="1" dirty="0">
-                <a:latin typeface="Microsoft JhengHei" pitchFamily="34" charset="-120"/>
-                <a:ea typeface="Microsoft JhengHei" pitchFamily="34" charset="-120"/>
+              <a:t>( </a:t>
+            </a:r>
+            <a:r>
+              <a:rPr lang="zh-CN" altLang="en-US" sz="3200" b="1" dirty="0">
+                <a:solidFill>
+                  <a:srgbClr val="000066"/>
+                </a:solidFill>
+                <a:latin typeface="Microsoft JhengHei" panose="020B0604030504040204" pitchFamily="34" charset="-120"/>
+                <a:ea typeface="Microsoft JhengHei" panose="020B0604030504040204" pitchFamily="34" charset="-120"/>
               </a:rPr>
-              <a:t>你名至高你的心寬容</a:t>
-            </a:r>
-            <a:endParaRPr lang="en-US" altLang="zh-TW" sz="5400" b="1" dirty="0">
-              <a:latin typeface="Microsoft JhengHei" pitchFamily="34" charset="-120"/>
-              <a:ea typeface="Microsoft JhengHei" pitchFamily="34" charset="-120"/>
-            </a:endParaRPr>
-          </a:p>
-          <a:p>
-            <a:pPr marL="0" indent="0" algn="ctr">
-              <a:buNone/>
-            </a:pPr>
-            <a:r>
-              <a:rPr lang="zh-TW" altLang="en-US" sz="5400" b="1" dirty="0">
-                <a:latin typeface="Microsoft JhengHei" pitchFamily="34" charset="-120"/>
-                <a:ea typeface="Microsoft JhengHei" pitchFamily="34" charset="-120"/>
+              <a:t>副歌</a:t>
+            </a:r>
+            <a:r>
+              <a:rPr lang="en-US" sz="3200" b="1" dirty="0">
+                <a:solidFill>
+                  <a:srgbClr val="000066"/>
+                </a:solidFill>
+                <a:latin typeface="Microsoft JhengHei" panose="020B0604030504040204" pitchFamily="34" charset="-120"/>
+                <a:ea typeface="Microsoft JhengHei" panose="020B0604030504040204" pitchFamily="34" charset="-120"/>
               </a:rPr>
-              <a:t>因你的美善 </a:t>
-            </a:r>
-            <a:endParaRPr lang="en-US" altLang="zh-TW" sz="5400" b="1" dirty="0">
-              <a:latin typeface="Microsoft JhengHei" pitchFamily="34" charset="-120"/>
-              <a:ea typeface="Microsoft JhengHei" pitchFamily="34" charset="-120"/>
-            </a:endParaRPr>
-          </a:p>
-          <a:p>
-            <a:pPr marL="0" indent="0" algn="ctr">
-              <a:buNone/>
-            </a:pPr>
-            <a:r>
-              <a:rPr lang="zh-TW" altLang="en-US" sz="5400" b="1" dirty="0">
-                <a:latin typeface="Microsoft JhengHei" pitchFamily="34" charset="-120"/>
-                <a:ea typeface="Microsoft JhengHei" pitchFamily="34" charset="-120"/>
-              </a:rPr>
-              <a:t>不住地歌頌你 </a:t>
-            </a:r>
-            <a:endParaRPr lang="en-US" altLang="zh-TW" sz="5400" b="1" dirty="0">
-              <a:latin typeface="Microsoft JhengHei" pitchFamily="34" charset="-120"/>
-              <a:ea typeface="Microsoft JhengHei" pitchFamily="34" charset="-120"/>
-            </a:endParaRPr>
-          </a:p>
-          <a:p>
-            <a:pPr marL="0" indent="0" algn="ctr">
-              <a:buNone/>
-            </a:pPr>
-            <a:r>
-              <a:rPr lang="zh-TW" altLang="en-US" sz="5400" b="1" dirty="0">
-                <a:latin typeface="Microsoft JhengHei" pitchFamily="34" charset="-120"/>
-                <a:ea typeface="Microsoft JhengHei" pitchFamily="34" charset="-120"/>
-              </a:rPr>
-              <a:t>千萬個理由我要敬拜你 </a:t>
-            </a:r>
-            <a:endParaRPr lang="en-US" sz="5400" b="1" dirty="0">
-              <a:latin typeface="Microsoft JhengHei" pitchFamily="34" charset="-120"/>
-              <a:ea typeface="Microsoft JhengHei" pitchFamily="34" charset="-120"/>
+              <a:t> )</a:t>
+            </a:r>
+            <a:endParaRPr lang="vi-VN" sz="3200" b="1" dirty="0">
+              <a:solidFill>
+                <a:srgbClr val="000066"/>
+              </a:solidFill>
+              <a:ea typeface="Microsoft JhengHei" panose="020B0604030504040204" pitchFamily="34" charset="-120"/>
             </a:endParaRPr>
           </a:p>
         </p:txBody>
@@ -3707,7 +3688,7 @@
     </p:spTree>
     <p:extLst>
       <p:ext uri="{BB962C8B-B14F-4D97-AF65-F5344CB8AC3E}">
-        <p14:creationId xmlns:p14="http://schemas.microsoft.com/office/powerpoint/2010/main" val="425488530"/>
+        <p14:creationId xmlns:p14="http://schemas.microsoft.com/office/powerpoint/2010/main" val="3102373059"/>
       </p:ext>
     </p:extLst>
   </p:cSld>
@@ -3722,7 +3703,13 @@
   <p:cSld>
     <p:spTree>
       <p:nvGrpSpPr>
-        <p:cNvPr id="1" name=""/>
+        <p:cNvPr id="1" name="">
+          <a:extLst>
+            <a:ext uri="{FF2B5EF4-FFF2-40B4-BE49-F238E27FC236}">
+              <a16:creationId xmlns:a16="http://schemas.microsoft.com/office/drawing/2014/main" id="{6016F3CB-A0DB-208A-1BB2-DE08472EBDCF}"/>
+            </a:ext>
+          </a:extLst>
+        </p:cNvPr>
         <p:cNvGrpSpPr/>
         <p:nvPr/>
       </p:nvGrpSpPr>
@@ -3736,141 +3723,127 @@
       </p:grpSpPr>
       <p:sp>
         <p:nvSpPr>
-          <p:cNvPr id="2" name="Title 1"/>
-          <p:cNvSpPr>
-            <a:spLocks noGrp="1"/>
-          </p:cNvSpPr>
-          <p:nvPr>
-            <p:ph type="title"/>
-          </p:nvPr>
-        </p:nvSpPr>
-        <p:spPr/>
-        <p:txBody>
-          <a:bodyPr>
+          <p:cNvPr id="5" name="內容版面配置區 4">
+            <a:extLst>
+              <a:ext uri="{FF2B5EF4-FFF2-40B4-BE49-F238E27FC236}">
+                <a16:creationId xmlns:a16="http://schemas.microsoft.com/office/drawing/2014/main" id="{55D17696-775E-B96D-62ED-CB7533E5DB53}"/>
+              </a:ext>
+            </a:extLst>
+          </p:cNvPr>
+          <p:cNvSpPr>
+            <a:spLocks noGrp="1"/>
+          </p:cNvSpPr>
+          <p:nvPr>
+            <p:ph idx="1"/>
+          </p:nvPr>
+        </p:nvSpPr>
+        <p:spPr>
+          <a:xfrm>
+            <a:off x="0" y="2084851"/>
+            <a:ext cx="12192000" cy="2404863"/>
+          </a:xfrm>
+        </p:spPr>
+        <p:txBody>
+          <a:bodyPr anchor="ctr">
             <a:normAutofit/>
           </a:bodyPr>
           <a:lstStyle/>
           <a:p>
-            <a:r>
-              <a:rPr lang="zh-CN" altLang="en-US" b="1" dirty="0">
-                <a:latin typeface="Microsoft JhengHei" pitchFamily="34" charset="-120"/>
-                <a:ea typeface="Microsoft JhengHei" pitchFamily="34" charset="-120"/>
+            <a:pPr algn="ctr">
+              <a:buNone/>
+            </a:pPr>
+            <a:r>
+              <a:rPr lang="zh-TW" altLang="en-US" sz="6400" b="1" dirty="0">
+                <a:solidFill>
+                  <a:srgbClr val="000066"/>
+                </a:solidFill>
+                <a:latin typeface="微軟正黑體" pitchFamily="34" charset="-120"/>
+                <a:ea typeface="微軟正黑體" pitchFamily="34" charset="-120"/>
               </a:rPr>
-              <a:t>千萬個理</a:t>
-            </a:r>
-            <a:r>
-              <a:rPr lang="zh-CN" altLang="en-US" b="1" dirty="0" smtClean="0">
-                <a:latin typeface="Microsoft JhengHei" pitchFamily="34" charset="-120"/>
-                <a:ea typeface="Microsoft JhengHei" pitchFamily="34" charset="-120"/>
+              <a:t>盡全心和全力  歌頌祢 </a:t>
+            </a:r>
+          </a:p>
+          <a:p>
+            <a:pPr algn="ctr">
+              <a:buNone/>
+            </a:pPr>
+            <a:r>
+              <a:rPr lang="zh-TW" altLang="en-US" sz="6400" b="1" dirty="0">
+                <a:solidFill>
+                  <a:srgbClr val="000066"/>
+                </a:solidFill>
+                <a:latin typeface="微軟正黑體" pitchFamily="34" charset="-120"/>
+                <a:ea typeface="微軟正黑體" pitchFamily="34" charset="-120"/>
               </a:rPr>
-              <a:t>由</a:t>
-            </a:r>
-            <a:endParaRPr lang="en-US" b="1" dirty="0">
-              <a:latin typeface="Microsoft JhengHei" pitchFamily="34" charset="-120"/>
-              <a:ea typeface="Microsoft JhengHei" pitchFamily="34" charset="-120"/>
-            </a:endParaRPr>
-          </a:p>
-        </p:txBody>
-      </p:sp>
-      <p:sp>
-        <p:nvSpPr>
-          <p:cNvPr id="3" name="Content Placeholder 2"/>
-          <p:cNvSpPr>
-            <a:spLocks noGrp="1"/>
-          </p:cNvSpPr>
-          <p:nvPr>
-            <p:ph idx="1"/>
-          </p:nvPr>
-        </p:nvSpPr>
-        <p:spPr/>
-        <p:txBody>
-          <a:bodyPr>
-            <a:normAutofit/>
+              <a:t>我尊崇祢的聖名</a:t>
+            </a:r>
+          </a:p>
+        </p:txBody>
+      </p:sp>
+      <p:sp>
+        <p:nvSpPr>
+          <p:cNvPr id="3" name="TextBox 2">
+            <a:extLst>
+              <a:ext uri="{FF2B5EF4-FFF2-40B4-BE49-F238E27FC236}">
+                <a16:creationId xmlns:a16="http://schemas.microsoft.com/office/drawing/2014/main" id="{7A49EFEC-6B4C-2C30-FCAC-2CC90BF49A6C}"/>
+              </a:ext>
+            </a:extLst>
+          </p:cNvPr>
+          <p:cNvSpPr txBox="1"/>
+          <p:nvPr/>
+        </p:nvSpPr>
+        <p:spPr>
+          <a:xfrm>
+            <a:off x="0" y="5362145"/>
+            <a:ext cx="12192000" cy="584775"/>
+          </a:xfrm>
+          <a:prstGeom prst="rect">
+            <a:avLst/>
+          </a:prstGeom>
+          <a:noFill/>
+        </p:spPr>
+        <p:txBody>
+          <a:bodyPr wrap="square" rtlCol="0">
+            <a:spAutoFit/>
           </a:bodyPr>
           <a:lstStyle/>
           <a:p>
-            <a:pPr marL="0" indent="0" algn="ctr">
-              <a:buNone/>
-            </a:pPr>
-            <a:r>
-              <a:rPr lang="zh-TW" altLang="en-US" sz="5400" b="1" dirty="0">
-                <a:latin typeface="Microsoft JhengHei" pitchFamily="34" charset="-120"/>
-                <a:ea typeface="Microsoft JhengHei" pitchFamily="34" charset="-120"/>
+            <a:pPr algn="ctr"/>
+            <a:r>
+              <a:rPr lang="en-US" sz="3200" b="1" dirty="0">
+                <a:solidFill>
+                  <a:srgbClr val="000066"/>
+                </a:solidFill>
+                <a:latin typeface="Microsoft JhengHei" panose="020B0604030504040204" pitchFamily="34" charset="-120"/>
+                <a:ea typeface="Microsoft JhengHei" panose="020B0604030504040204" pitchFamily="34" charset="-120"/>
               </a:rPr>
-              <a:t>頌讚主 我的靈 我的魂 </a:t>
-            </a:r>
-            <a:endParaRPr lang="en-US" altLang="zh-TW" sz="5400" b="1" dirty="0" smtClean="0">
-              <a:latin typeface="Microsoft JhengHei" pitchFamily="34" charset="-120"/>
-              <a:ea typeface="Microsoft JhengHei" pitchFamily="34" charset="-120"/>
-            </a:endParaRPr>
-          </a:p>
-          <a:p>
-            <a:pPr marL="0" indent="0" algn="ctr">
-              <a:buNone/>
-            </a:pPr>
-            <a:r>
-              <a:rPr lang="zh-TW" altLang="en-US" sz="5400" b="1" dirty="0" smtClean="0">
-                <a:latin typeface="Microsoft JhengHei" pitchFamily="34" charset="-120"/>
-                <a:ea typeface="Microsoft JhengHei" pitchFamily="34" charset="-120"/>
+              <a:t>( </a:t>
+            </a:r>
+            <a:r>
+              <a:rPr lang="zh-CN" altLang="en-US" sz="3200" b="1" dirty="0">
+                <a:solidFill>
+                  <a:srgbClr val="000066"/>
+                </a:solidFill>
+                <a:latin typeface="Microsoft JhengHei" panose="020B0604030504040204" pitchFamily="34" charset="-120"/>
+                <a:ea typeface="Microsoft JhengHei" panose="020B0604030504040204" pitchFamily="34" charset="-120"/>
               </a:rPr>
-              <a:t>尊</a:t>
-            </a:r>
-            <a:r>
-              <a:rPr lang="zh-TW" altLang="en-US" sz="5400" b="1" dirty="0">
-                <a:latin typeface="Microsoft JhengHei" pitchFamily="34" charset="-120"/>
-                <a:ea typeface="Microsoft JhengHei" pitchFamily="34" charset="-120"/>
+              <a:t>副歌</a:t>
+            </a:r>
+            <a:r>
+              <a:rPr lang="en-US" sz="3200" b="1" dirty="0">
+                <a:solidFill>
+                  <a:srgbClr val="000066"/>
+                </a:solidFill>
+                <a:latin typeface="Microsoft JhengHei" panose="020B0604030504040204" pitchFamily="34" charset="-120"/>
+                <a:ea typeface="Microsoft JhengHei" panose="020B0604030504040204" pitchFamily="34" charset="-120"/>
               </a:rPr>
-              <a:t>崇祂的聖名 </a:t>
-            </a:r>
-            <a:endParaRPr lang="en-US" altLang="zh-TW" sz="5400" b="1" dirty="0">
-              <a:latin typeface="Microsoft JhengHei" pitchFamily="34" charset="-120"/>
-              <a:ea typeface="Microsoft JhengHei" pitchFamily="34" charset="-120"/>
-            </a:endParaRPr>
-          </a:p>
-          <a:p>
-            <a:pPr marL="0" indent="0" algn="ctr">
-              <a:buNone/>
-            </a:pPr>
-            <a:r>
-              <a:rPr lang="zh-TW" altLang="en-US" sz="5400" b="1" dirty="0" smtClean="0">
-                <a:latin typeface="Microsoft JhengHei" pitchFamily="34" charset="-120"/>
-                <a:ea typeface="Microsoft JhengHei" pitchFamily="34" charset="-120"/>
-              </a:rPr>
-              <a:t>盡</a:t>
-            </a:r>
-            <a:r>
-              <a:rPr lang="zh-TW" altLang="en-US" sz="5400" b="1" dirty="0">
-                <a:latin typeface="Microsoft JhengHei" pitchFamily="34" charset="-120"/>
-                <a:ea typeface="Microsoft JhengHei" pitchFamily="34" charset="-120"/>
-              </a:rPr>
-              <a:t>全心和全力 歌頌你 </a:t>
-            </a:r>
-            <a:endParaRPr lang="en-US" altLang="zh-TW" sz="5400" b="1" dirty="0" smtClean="0">
-              <a:latin typeface="Microsoft JhengHei" pitchFamily="34" charset="-120"/>
-              <a:ea typeface="Microsoft JhengHei" pitchFamily="34" charset="-120"/>
-            </a:endParaRPr>
-          </a:p>
-          <a:p>
-            <a:pPr marL="0" indent="0" algn="ctr">
-              <a:buNone/>
-            </a:pPr>
-            <a:r>
-              <a:rPr lang="zh-TW" altLang="en-US" sz="5400" b="1" dirty="0" smtClean="0">
-                <a:latin typeface="Microsoft JhengHei" pitchFamily="34" charset="-120"/>
-                <a:ea typeface="Microsoft JhengHei" pitchFamily="34" charset="-120"/>
-              </a:rPr>
-              <a:t>我</a:t>
-            </a:r>
-            <a:r>
-              <a:rPr lang="zh-TW" altLang="en-US" sz="5400" b="1" dirty="0">
-                <a:latin typeface="Microsoft JhengHei" pitchFamily="34" charset="-120"/>
-                <a:ea typeface="Microsoft JhengHei" pitchFamily="34" charset="-120"/>
-              </a:rPr>
-              <a:t>尊崇你的聖名</a:t>
-            </a:r>
-            <a:endParaRPr lang="en-US" sz="5400" b="1" dirty="0">
-              <a:latin typeface="Microsoft JhengHei" pitchFamily="34" charset="-120"/>
-              <a:ea typeface="Microsoft JhengHei" pitchFamily="34" charset="-120"/>
+              <a:t> )</a:t>
+            </a:r>
+            <a:endParaRPr lang="vi-VN" sz="3200" b="1" dirty="0">
+              <a:solidFill>
+                <a:srgbClr val="000066"/>
+              </a:solidFill>
+              <a:ea typeface="Microsoft JhengHei" panose="020B0604030504040204" pitchFamily="34" charset="-120"/>
             </a:endParaRPr>
           </a:p>
         </p:txBody>
@@ -3878,7 +3851,7 @@
     </p:spTree>
     <p:extLst>
       <p:ext uri="{BB962C8B-B14F-4D97-AF65-F5344CB8AC3E}">
-        <p14:creationId xmlns:p14="http://schemas.microsoft.com/office/powerpoint/2010/main" val="4180881830"/>
+        <p14:creationId xmlns:p14="http://schemas.microsoft.com/office/powerpoint/2010/main" val="857688751"/>
       </p:ext>
     </p:extLst>
   </p:cSld>
@@ -3893,7 +3866,13 @@
   <p:cSld>
     <p:spTree>
       <p:nvGrpSpPr>
-        <p:cNvPr id="1" name=""/>
+        <p:cNvPr id="1" name="">
+          <a:extLst>
+            <a:ext uri="{FF2B5EF4-FFF2-40B4-BE49-F238E27FC236}">
+              <a16:creationId xmlns:a16="http://schemas.microsoft.com/office/drawing/2014/main" id="{01C90496-3453-F666-8CCE-393CAD920675}"/>
+            </a:ext>
+          </a:extLst>
+        </p:cNvPr>
         <p:cNvGrpSpPr/>
         <p:nvPr/>
       </p:nvGrpSpPr>
@@ -3907,125 +3886,137 @@
       </p:grpSpPr>
       <p:sp>
         <p:nvSpPr>
-          <p:cNvPr id="2" name="Title 1"/>
-          <p:cNvSpPr>
-            <a:spLocks noGrp="1"/>
-          </p:cNvSpPr>
-          <p:nvPr>
-            <p:ph type="title"/>
-          </p:nvPr>
-        </p:nvSpPr>
-        <p:spPr/>
-        <p:txBody>
-          <a:bodyPr>
+          <p:cNvPr id="5" name="內容版面配置區 4">
+            <a:extLst>
+              <a:ext uri="{FF2B5EF4-FFF2-40B4-BE49-F238E27FC236}">
+                <a16:creationId xmlns:a16="http://schemas.microsoft.com/office/drawing/2014/main" id="{A198C943-3175-88F1-0B7D-0698D67CB337}"/>
+              </a:ext>
+            </a:extLst>
+          </p:cNvPr>
+          <p:cNvSpPr>
+            <a:spLocks noGrp="1"/>
+          </p:cNvSpPr>
+          <p:nvPr>
+            <p:ph idx="1"/>
+          </p:nvPr>
+        </p:nvSpPr>
+        <p:spPr>
+          <a:xfrm>
+            <a:off x="0" y="2084851"/>
+            <a:ext cx="12192000" cy="2404863"/>
+          </a:xfrm>
+        </p:spPr>
+        <p:txBody>
+          <a:bodyPr anchor="ctr">
             <a:normAutofit/>
           </a:bodyPr>
           <a:lstStyle/>
           <a:p>
-            <a:r>
-              <a:rPr lang="zh-CN" altLang="en-US" b="1" dirty="0">
-                <a:latin typeface="Microsoft JhengHei" pitchFamily="34" charset="-120"/>
-                <a:ea typeface="Microsoft JhengHei" pitchFamily="34" charset="-120"/>
+            <a:pPr algn="ctr">
+              <a:buNone/>
+            </a:pPr>
+            <a:r>
+              <a:rPr lang="zh-TW" altLang="en-US" sz="6400" b="1" dirty="0">
+                <a:solidFill>
+                  <a:srgbClr val="000066"/>
+                </a:solidFill>
+                <a:latin typeface="微軟正黑體" pitchFamily="34" charset="-120"/>
+                <a:ea typeface="微軟正黑體" pitchFamily="34" charset="-120"/>
               </a:rPr>
-              <a:t>千萬個理</a:t>
-            </a:r>
-            <a:r>
-              <a:rPr lang="zh-CN" altLang="en-US" b="1" dirty="0" smtClean="0">
-                <a:latin typeface="Microsoft JhengHei" pitchFamily="34" charset="-120"/>
-                <a:ea typeface="Microsoft JhengHei" pitchFamily="34" charset="-120"/>
+              <a:t>豐盛慈愛且不輕易發怒 </a:t>
+            </a:r>
+          </a:p>
+          <a:p>
+            <a:pPr algn="ctr">
+              <a:buNone/>
+            </a:pPr>
+            <a:r>
+              <a:rPr lang="zh-TW" altLang="en-US" sz="6400" b="1" dirty="0">
+                <a:solidFill>
+                  <a:srgbClr val="000066"/>
+                </a:solidFill>
+                <a:latin typeface="微軟正黑體" pitchFamily="34" charset="-120"/>
+                <a:ea typeface="微軟正黑體" pitchFamily="34" charset="-120"/>
               </a:rPr>
-              <a:t>由</a:t>
-            </a:r>
-            <a:endParaRPr lang="en-US" b="1" dirty="0">
-              <a:latin typeface="Microsoft JhengHei" pitchFamily="34" charset="-120"/>
-              <a:ea typeface="Microsoft JhengHei" pitchFamily="34" charset="-120"/>
-            </a:endParaRPr>
-          </a:p>
-        </p:txBody>
-      </p:sp>
-      <p:sp>
-        <p:nvSpPr>
-          <p:cNvPr id="3" name="Content Placeholder 2"/>
-          <p:cNvSpPr>
-            <a:spLocks noGrp="1"/>
-          </p:cNvSpPr>
-          <p:nvPr>
-            <p:ph idx="1"/>
-          </p:nvPr>
+              <a:t>祢名至高  祢的心寬容</a:t>
+            </a:r>
+          </a:p>
+        </p:txBody>
+      </p:sp>
+      <p:sp>
+        <p:nvSpPr>
+          <p:cNvPr id="3" name="TextBox 2">
+            <a:extLst>
+              <a:ext uri="{FF2B5EF4-FFF2-40B4-BE49-F238E27FC236}">
+                <a16:creationId xmlns:a16="http://schemas.microsoft.com/office/drawing/2014/main" id="{D5A953D9-6AC7-4ED2-3ACE-8E3F402BFB02}"/>
+              </a:ext>
+            </a:extLst>
+          </p:cNvPr>
+          <p:cNvSpPr txBox="1"/>
+          <p:nvPr/>
         </p:nvSpPr>
         <p:spPr>
           <a:xfrm>
-            <a:off x="0" y="1600200"/>
-            <a:ext cx="9144000" cy="5029200"/>
+            <a:off x="0" y="5362145"/>
+            <a:ext cx="12192000" cy="584775"/>
           </a:xfrm>
+          <a:prstGeom prst="rect">
+            <a:avLst/>
+          </a:prstGeom>
+          <a:noFill/>
         </p:spPr>
         <p:txBody>
-          <a:bodyPr>
-            <a:normAutofit/>
+          <a:bodyPr wrap="square" rtlCol="0">
+            <a:spAutoFit/>
           </a:bodyPr>
           <a:lstStyle/>
           <a:p>
-            <a:pPr marL="0" indent="0" algn="ctr">
-              <a:buNone/>
-            </a:pPr>
-            <a:r>
-              <a:rPr lang="zh-TW" altLang="en-US" sz="5400" b="1" dirty="0">
-                <a:latin typeface="Microsoft JhengHei" pitchFamily="34" charset="-120"/>
-                <a:ea typeface="Microsoft JhengHei" pitchFamily="34" charset="-120"/>
+            <a:pPr algn="ctr"/>
+            <a:r>
+              <a:rPr lang="en-US" sz="3200" b="1" dirty="0">
+                <a:solidFill>
+                  <a:srgbClr val="000066"/>
+                </a:solidFill>
+                <a:latin typeface="Microsoft JhengHei" panose="020B0604030504040204" pitchFamily="34" charset="-120"/>
+                <a:ea typeface="Microsoft JhengHei" panose="020B0604030504040204" pitchFamily="34" charset="-120"/>
               </a:rPr>
-              <a:t>那日來臨 我的力量消失 </a:t>
-            </a:r>
-            <a:endParaRPr lang="en-US" altLang="zh-TW" sz="5400" b="1" dirty="0">
-              <a:latin typeface="Microsoft JhengHei" pitchFamily="34" charset="-120"/>
-              <a:ea typeface="Microsoft JhengHei" pitchFamily="34" charset="-120"/>
-            </a:endParaRPr>
-          </a:p>
-          <a:p>
-            <a:pPr marL="0" indent="0" algn="ctr">
-              <a:buNone/>
-            </a:pPr>
-            <a:r>
-              <a:rPr lang="zh-TW" altLang="en-US" sz="5400" b="1" dirty="0">
-                <a:latin typeface="Microsoft JhengHei" pitchFamily="34" charset="-120"/>
-                <a:ea typeface="Microsoft JhengHei" pitchFamily="34" charset="-120"/>
+              <a:t>( </a:t>
+            </a:r>
+            <a:r>
+              <a:rPr lang="zh-CN" altLang="en-US" sz="3200" b="1" dirty="0">
+                <a:solidFill>
+                  <a:srgbClr val="000066"/>
+                </a:solidFill>
+                <a:latin typeface="Microsoft JhengHei" panose="020B0604030504040204" pitchFamily="34" charset="-120"/>
+                <a:ea typeface="Microsoft JhengHei" panose="020B0604030504040204" pitchFamily="34" charset="-120"/>
               </a:rPr>
-              <a:t>生命到盡頭的時候來到</a:t>
-            </a:r>
-            <a:endParaRPr lang="en-US" altLang="zh-TW" sz="5400" b="1" dirty="0">
-              <a:latin typeface="Microsoft JhengHei" pitchFamily="34" charset="-120"/>
-              <a:ea typeface="Microsoft JhengHei" pitchFamily="34" charset="-120"/>
-            </a:endParaRPr>
-          </a:p>
-          <a:p>
-            <a:pPr marL="0" indent="0" algn="ctr">
-              <a:buNone/>
-            </a:pPr>
-            <a:r>
-              <a:rPr lang="zh-TW" altLang="en-US" sz="5400" b="1" dirty="0">
-                <a:latin typeface="Microsoft JhengHei" pitchFamily="34" charset="-120"/>
-                <a:ea typeface="Microsoft JhengHei" pitchFamily="34" charset="-120"/>
+              <a:t>正歌 </a:t>
+            </a:r>
+            <a:r>
+              <a:rPr lang="en-US" altLang="zh-CN" sz="3200" b="1" dirty="0">
+                <a:solidFill>
+                  <a:srgbClr val="000066"/>
+                </a:solidFill>
+                <a:latin typeface="Microsoft JhengHei" panose="020B0604030504040204" pitchFamily="34" charset="-120"/>
+                <a:ea typeface="Microsoft JhengHei" panose="020B0604030504040204" pitchFamily="34" charset="-120"/>
               </a:rPr>
-              <a:t>我心堅定 無止盡歌頌你 </a:t>
-            </a:r>
-            <a:endParaRPr lang="en-US" altLang="zh-TW" sz="5400" b="1" dirty="0">
-              <a:latin typeface="Microsoft JhengHei" pitchFamily="34" charset="-120"/>
-              <a:ea typeface="Microsoft JhengHei" pitchFamily="34" charset="-120"/>
-            </a:endParaRPr>
-          </a:p>
-          <a:p>
-            <a:pPr marL="0" indent="0" algn="ctr">
-              <a:buNone/>
-            </a:pPr>
-            <a:r>
-              <a:rPr lang="zh-TW" altLang="en-US" sz="5400" b="1" dirty="0">
-                <a:latin typeface="Microsoft JhengHei" pitchFamily="34" charset="-120"/>
-                <a:ea typeface="Microsoft JhengHei" pitchFamily="34" charset="-120"/>
+              <a:t>2</a:t>
+            </a:r>
+            <a:r>
+              <a:rPr lang="en-US" sz="3200" b="1" dirty="0">
+                <a:solidFill>
+                  <a:srgbClr val="000066"/>
+                </a:solidFill>
+                <a:latin typeface="Microsoft JhengHei" panose="020B0604030504040204" pitchFamily="34" charset="-120"/>
+                <a:ea typeface="Microsoft JhengHei" panose="020B0604030504040204" pitchFamily="34" charset="-120"/>
               </a:rPr>
-              <a:t>千萬年一直到永永遠遠</a:t>
-            </a:r>
-            <a:endParaRPr lang="en-US" sz="5400" b="1" dirty="0">
-              <a:latin typeface="Microsoft JhengHei" pitchFamily="34" charset="-120"/>
-              <a:ea typeface="Microsoft JhengHei" pitchFamily="34" charset="-120"/>
+              <a:t> )</a:t>
+            </a:r>
+            <a:endParaRPr lang="vi-VN" sz="3200" b="1" dirty="0">
+              <a:solidFill>
+                <a:srgbClr val="000066"/>
+              </a:solidFill>
+              <a:ea typeface="Microsoft JhengHei" panose="020B0604030504040204" pitchFamily="34" charset="-120"/>
             </a:endParaRPr>
           </a:p>
         </p:txBody>
@@ -4033,7 +4024,7 @@
     </p:spTree>
     <p:extLst>
       <p:ext uri="{BB962C8B-B14F-4D97-AF65-F5344CB8AC3E}">
-        <p14:creationId xmlns:p14="http://schemas.microsoft.com/office/powerpoint/2010/main" val="552713821"/>
+        <p14:creationId xmlns:p14="http://schemas.microsoft.com/office/powerpoint/2010/main" val="482376859"/>
       </p:ext>
     </p:extLst>
   </p:cSld>
@@ -4048,7 +4039,13 @@
   <p:cSld>
     <p:spTree>
       <p:nvGrpSpPr>
-        <p:cNvPr id="1" name=""/>
+        <p:cNvPr id="1" name="">
+          <a:extLst>
+            <a:ext uri="{FF2B5EF4-FFF2-40B4-BE49-F238E27FC236}">
+              <a16:creationId xmlns:a16="http://schemas.microsoft.com/office/drawing/2014/main" id="{F766D981-2E92-0BE8-82E4-73A7EFC6B4E2}"/>
+            </a:ext>
+          </a:extLst>
+        </p:cNvPr>
         <p:cNvGrpSpPr/>
         <p:nvPr/>
       </p:nvGrpSpPr>
@@ -4062,141 +4059,137 @@
       </p:grpSpPr>
       <p:sp>
         <p:nvSpPr>
-          <p:cNvPr id="2" name="Title 1"/>
-          <p:cNvSpPr>
-            <a:spLocks noGrp="1"/>
-          </p:cNvSpPr>
-          <p:nvPr>
-            <p:ph type="title"/>
-          </p:nvPr>
-        </p:nvSpPr>
-        <p:spPr/>
-        <p:txBody>
-          <a:bodyPr>
+          <p:cNvPr id="5" name="內容版面配置區 4">
+            <a:extLst>
+              <a:ext uri="{FF2B5EF4-FFF2-40B4-BE49-F238E27FC236}">
+                <a16:creationId xmlns:a16="http://schemas.microsoft.com/office/drawing/2014/main" id="{9C39CD5D-7B2B-8EF1-1F44-7DAABFA7C913}"/>
+              </a:ext>
+            </a:extLst>
+          </p:cNvPr>
+          <p:cNvSpPr>
+            <a:spLocks noGrp="1"/>
+          </p:cNvSpPr>
+          <p:nvPr>
+            <p:ph idx="1"/>
+          </p:nvPr>
+        </p:nvSpPr>
+        <p:spPr>
+          <a:xfrm>
+            <a:off x="0" y="2084851"/>
+            <a:ext cx="12192000" cy="2404863"/>
+          </a:xfrm>
+        </p:spPr>
+        <p:txBody>
+          <a:bodyPr anchor="ctr">
             <a:normAutofit/>
           </a:bodyPr>
           <a:lstStyle/>
           <a:p>
-            <a:r>
-              <a:rPr lang="zh-CN" altLang="en-US" b="1" dirty="0">
-                <a:latin typeface="Microsoft JhengHei" pitchFamily="34" charset="-120"/>
-                <a:ea typeface="Microsoft JhengHei" pitchFamily="34" charset="-120"/>
+            <a:pPr algn="ctr">
+              <a:buNone/>
+            </a:pPr>
+            <a:r>
+              <a:rPr lang="zh-TW" altLang="en-US" sz="6400" b="1" dirty="0">
+                <a:solidFill>
+                  <a:srgbClr val="000066"/>
+                </a:solidFill>
+                <a:latin typeface="微軟正黑體" pitchFamily="34" charset="-120"/>
+                <a:ea typeface="微軟正黑體" pitchFamily="34" charset="-120"/>
               </a:rPr>
-              <a:t>千萬個理</a:t>
-            </a:r>
-            <a:r>
-              <a:rPr lang="zh-CN" altLang="en-US" b="1" dirty="0" smtClean="0">
-                <a:latin typeface="Microsoft JhengHei" pitchFamily="34" charset="-120"/>
-                <a:ea typeface="Microsoft JhengHei" pitchFamily="34" charset="-120"/>
+              <a:t>因祢的美善  不住地歌頌祢 </a:t>
+            </a:r>
+          </a:p>
+          <a:p>
+            <a:pPr algn="ctr">
+              <a:buNone/>
+            </a:pPr>
+            <a:r>
+              <a:rPr lang="zh-TW" altLang="en-US" sz="6400" b="1" dirty="0">
+                <a:solidFill>
+                  <a:srgbClr val="000066"/>
+                </a:solidFill>
+                <a:latin typeface="微軟正黑體" pitchFamily="34" charset="-120"/>
+                <a:ea typeface="微軟正黑體" pitchFamily="34" charset="-120"/>
               </a:rPr>
-              <a:t>由</a:t>
-            </a:r>
-            <a:endParaRPr lang="en-US" b="1" dirty="0">
-              <a:latin typeface="Microsoft JhengHei" pitchFamily="34" charset="-120"/>
-              <a:ea typeface="Microsoft JhengHei" pitchFamily="34" charset="-120"/>
-            </a:endParaRPr>
-          </a:p>
-        </p:txBody>
-      </p:sp>
-      <p:sp>
-        <p:nvSpPr>
-          <p:cNvPr id="3" name="Content Placeholder 2"/>
-          <p:cNvSpPr>
-            <a:spLocks noGrp="1"/>
-          </p:cNvSpPr>
-          <p:nvPr>
-            <p:ph idx="1"/>
-          </p:nvPr>
-        </p:nvSpPr>
-        <p:spPr/>
-        <p:txBody>
-          <a:bodyPr>
-            <a:normAutofit/>
+              <a:t>千萬個理由我要敬拜祢</a:t>
+            </a:r>
+          </a:p>
+        </p:txBody>
+      </p:sp>
+      <p:sp>
+        <p:nvSpPr>
+          <p:cNvPr id="3" name="TextBox 2">
+            <a:extLst>
+              <a:ext uri="{FF2B5EF4-FFF2-40B4-BE49-F238E27FC236}">
+                <a16:creationId xmlns:a16="http://schemas.microsoft.com/office/drawing/2014/main" id="{952A772C-9329-7837-17FE-1960616AA8C4}"/>
+              </a:ext>
+            </a:extLst>
+          </p:cNvPr>
+          <p:cNvSpPr txBox="1"/>
+          <p:nvPr/>
+        </p:nvSpPr>
+        <p:spPr>
+          <a:xfrm>
+            <a:off x="0" y="5362145"/>
+            <a:ext cx="12192000" cy="584775"/>
+          </a:xfrm>
+          <a:prstGeom prst="rect">
+            <a:avLst/>
+          </a:prstGeom>
+          <a:noFill/>
+        </p:spPr>
+        <p:txBody>
+          <a:bodyPr wrap="square" rtlCol="0">
+            <a:spAutoFit/>
           </a:bodyPr>
           <a:lstStyle/>
           <a:p>
-            <a:pPr marL="0" indent="0" algn="ctr">
-              <a:buNone/>
-            </a:pPr>
-            <a:r>
-              <a:rPr lang="zh-TW" altLang="en-US" sz="5400" b="1" dirty="0">
-                <a:latin typeface="Microsoft JhengHei" pitchFamily="34" charset="-120"/>
-                <a:ea typeface="Microsoft JhengHei" pitchFamily="34" charset="-120"/>
+            <a:pPr algn="ctr"/>
+            <a:r>
+              <a:rPr lang="en-US" sz="3200" b="1" dirty="0">
+                <a:solidFill>
+                  <a:srgbClr val="000066"/>
+                </a:solidFill>
+                <a:latin typeface="Microsoft JhengHei" panose="020B0604030504040204" pitchFamily="34" charset="-120"/>
+                <a:ea typeface="Microsoft JhengHei" panose="020B0604030504040204" pitchFamily="34" charset="-120"/>
               </a:rPr>
-              <a:t>頌讚主 我的靈 我的魂 </a:t>
-            </a:r>
-            <a:endParaRPr lang="en-US" altLang="zh-TW" sz="5400" b="1" dirty="0" smtClean="0">
-              <a:latin typeface="Microsoft JhengHei" pitchFamily="34" charset="-120"/>
-              <a:ea typeface="Microsoft JhengHei" pitchFamily="34" charset="-120"/>
-            </a:endParaRPr>
-          </a:p>
-          <a:p>
-            <a:pPr marL="0" indent="0" algn="ctr">
-              <a:buNone/>
-            </a:pPr>
-            <a:r>
-              <a:rPr lang="zh-TW" altLang="en-US" sz="5400" b="1" dirty="0" smtClean="0">
-                <a:latin typeface="Microsoft JhengHei" pitchFamily="34" charset="-120"/>
-                <a:ea typeface="Microsoft JhengHei" pitchFamily="34" charset="-120"/>
+              <a:t>( </a:t>
+            </a:r>
+            <a:r>
+              <a:rPr lang="zh-CN" altLang="en-US" sz="3200" b="1" dirty="0">
+                <a:solidFill>
+                  <a:srgbClr val="000066"/>
+                </a:solidFill>
+                <a:latin typeface="Microsoft JhengHei" panose="020B0604030504040204" pitchFamily="34" charset="-120"/>
+                <a:ea typeface="Microsoft JhengHei" panose="020B0604030504040204" pitchFamily="34" charset="-120"/>
               </a:rPr>
-              <a:t>尊</a:t>
-            </a:r>
-            <a:r>
-              <a:rPr lang="zh-TW" altLang="en-US" sz="5400" b="1" dirty="0">
-                <a:latin typeface="Microsoft JhengHei" pitchFamily="34" charset="-120"/>
-                <a:ea typeface="Microsoft JhengHei" pitchFamily="34" charset="-120"/>
+              <a:t>正歌 </a:t>
+            </a:r>
+            <a:r>
+              <a:rPr lang="en-US" altLang="zh-CN" sz="3200" b="1" dirty="0">
+                <a:solidFill>
+                  <a:srgbClr val="000066"/>
+                </a:solidFill>
+                <a:latin typeface="Microsoft JhengHei" panose="020B0604030504040204" pitchFamily="34" charset="-120"/>
+                <a:ea typeface="Microsoft JhengHei" panose="020B0604030504040204" pitchFamily="34" charset="-120"/>
               </a:rPr>
-              <a:t>崇祂的聖名 </a:t>
-            </a:r>
-            <a:endParaRPr lang="en-US" altLang="zh-TW" sz="5400" b="1" dirty="0">
-              <a:latin typeface="Microsoft JhengHei" pitchFamily="34" charset="-120"/>
-              <a:ea typeface="Microsoft JhengHei" pitchFamily="34" charset="-120"/>
-            </a:endParaRPr>
-          </a:p>
-          <a:p>
-            <a:pPr marL="0" indent="0" algn="ctr">
-              <a:buNone/>
-            </a:pPr>
-            <a:r>
-              <a:rPr lang="zh-TW" altLang="en-US" sz="5400" b="1" dirty="0" smtClean="0">
-                <a:latin typeface="Microsoft JhengHei" pitchFamily="34" charset="-120"/>
-                <a:ea typeface="Microsoft JhengHei" pitchFamily="34" charset="-120"/>
+              <a:t>2</a:t>
+            </a:r>
+            <a:r>
+              <a:rPr lang="en-US" sz="3200" b="1" dirty="0">
+                <a:solidFill>
+                  <a:srgbClr val="000066"/>
+                </a:solidFill>
+                <a:latin typeface="Microsoft JhengHei" panose="020B0604030504040204" pitchFamily="34" charset="-120"/>
+                <a:ea typeface="Microsoft JhengHei" panose="020B0604030504040204" pitchFamily="34" charset="-120"/>
               </a:rPr>
-              <a:t>盡</a:t>
-            </a:r>
-            <a:r>
-              <a:rPr lang="zh-TW" altLang="en-US" sz="5400" b="1" dirty="0">
-                <a:latin typeface="Microsoft JhengHei" pitchFamily="34" charset="-120"/>
-                <a:ea typeface="Microsoft JhengHei" pitchFamily="34" charset="-120"/>
-              </a:rPr>
-              <a:t>全心和全力 歌頌你 </a:t>
-            </a:r>
-            <a:endParaRPr lang="en-US" altLang="zh-TW" sz="5400" b="1" dirty="0" smtClean="0">
-              <a:latin typeface="Microsoft JhengHei" pitchFamily="34" charset="-120"/>
-              <a:ea typeface="Microsoft JhengHei" pitchFamily="34" charset="-120"/>
-            </a:endParaRPr>
-          </a:p>
-          <a:p>
-            <a:pPr marL="0" indent="0" algn="ctr">
-              <a:buNone/>
-            </a:pPr>
-            <a:r>
-              <a:rPr lang="zh-TW" altLang="en-US" sz="5400" b="1" dirty="0" smtClean="0">
-                <a:latin typeface="Microsoft JhengHei" pitchFamily="34" charset="-120"/>
-                <a:ea typeface="Microsoft JhengHei" pitchFamily="34" charset="-120"/>
-              </a:rPr>
-              <a:t>我</a:t>
-            </a:r>
-            <a:r>
-              <a:rPr lang="zh-TW" altLang="en-US" sz="5400" b="1" dirty="0">
-                <a:latin typeface="Microsoft JhengHei" pitchFamily="34" charset="-120"/>
-                <a:ea typeface="Microsoft JhengHei" pitchFamily="34" charset="-120"/>
-              </a:rPr>
-              <a:t>尊崇你的聖名</a:t>
-            </a:r>
-            <a:endParaRPr lang="en-US" sz="5400" b="1" dirty="0">
-              <a:latin typeface="Microsoft JhengHei" pitchFamily="34" charset="-120"/>
-              <a:ea typeface="Microsoft JhengHei" pitchFamily="34" charset="-120"/>
+              <a:t> )</a:t>
+            </a:r>
+            <a:endParaRPr lang="vi-VN" sz="3200" b="1" dirty="0">
+              <a:solidFill>
+                <a:srgbClr val="000066"/>
+              </a:solidFill>
+              <a:ea typeface="Microsoft JhengHei" panose="020B0604030504040204" pitchFamily="34" charset="-120"/>
             </a:endParaRPr>
           </a:p>
         </p:txBody>
@@ -4204,7 +4197,353 @@
     </p:spTree>
     <p:extLst>
       <p:ext uri="{BB962C8B-B14F-4D97-AF65-F5344CB8AC3E}">
-        <p14:creationId xmlns:p14="http://schemas.microsoft.com/office/powerpoint/2010/main" val="511344639"/>
+        <p14:creationId xmlns:p14="http://schemas.microsoft.com/office/powerpoint/2010/main" val="2413636766"/>
+      </p:ext>
+    </p:extLst>
+  </p:cSld>
+  <p:clrMapOvr>
+    <a:masterClrMapping/>
+  </p:clrMapOvr>
+</p:sld>
+</file>
+
+<file path=ppt/slides/slide8.xml><?xml version="1.0" encoding="utf-8"?>
+<p:sld xmlns:a="http://schemas.openxmlformats.org/drawingml/2006/main" xmlns:r="http://schemas.openxmlformats.org/officeDocument/2006/relationships" xmlns:p="http://schemas.openxmlformats.org/presentationml/2006/main">
+  <p:cSld>
+    <p:spTree>
+      <p:nvGrpSpPr>
+        <p:cNvPr id="1" name="">
+          <a:extLst>
+            <a:ext uri="{FF2B5EF4-FFF2-40B4-BE49-F238E27FC236}">
+              <a16:creationId xmlns:a16="http://schemas.microsoft.com/office/drawing/2014/main" id="{66AC0C0D-EC62-7030-4E76-98CE63FB2DCD}"/>
+            </a:ext>
+          </a:extLst>
+        </p:cNvPr>
+        <p:cNvGrpSpPr/>
+        <p:nvPr/>
+      </p:nvGrpSpPr>
+      <p:grpSpPr>
+        <a:xfrm>
+          <a:off x="0" y="0"/>
+          <a:ext cx="0" cy="0"/>
+          <a:chOff x="0" y="0"/>
+          <a:chExt cx="0" cy="0"/>
+        </a:xfrm>
+      </p:grpSpPr>
+      <p:sp>
+        <p:nvSpPr>
+          <p:cNvPr id="5" name="內容版面配置區 4">
+            <a:extLst>
+              <a:ext uri="{FF2B5EF4-FFF2-40B4-BE49-F238E27FC236}">
+                <a16:creationId xmlns:a16="http://schemas.microsoft.com/office/drawing/2014/main" id="{5A36E533-54AF-65C8-BD62-1E882FE955BA}"/>
+              </a:ext>
+            </a:extLst>
+          </p:cNvPr>
+          <p:cNvSpPr>
+            <a:spLocks noGrp="1"/>
+          </p:cNvSpPr>
+          <p:nvPr>
+            <p:ph idx="1"/>
+          </p:nvPr>
+        </p:nvSpPr>
+        <p:spPr>
+          <a:xfrm>
+            <a:off x="0" y="2084851"/>
+            <a:ext cx="12192000" cy="2404863"/>
+          </a:xfrm>
+        </p:spPr>
+        <p:txBody>
+          <a:bodyPr anchor="ctr">
+            <a:normAutofit/>
+          </a:bodyPr>
+          <a:lstStyle/>
+          <a:p>
+            <a:pPr algn="ctr">
+              <a:buNone/>
+            </a:pPr>
+            <a:r>
+              <a:rPr lang="zh-TW" altLang="en-US" sz="6400" b="1" dirty="0">
+                <a:solidFill>
+                  <a:srgbClr val="000066"/>
+                </a:solidFill>
+                <a:latin typeface="微軟正黑體" pitchFamily="34" charset="-120"/>
+                <a:ea typeface="微軟正黑體" pitchFamily="34" charset="-120"/>
+              </a:rPr>
+              <a:t>那日來臨  我的力量消失 </a:t>
+            </a:r>
+          </a:p>
+          <a:p>
+            <a:pPr algn="ctr">
+              <a:buNone/>
+            </a:pPr>
+            <a:r>
+              <a:rPr lang="zh-TW" altLang="en-US" sz="6400" b="1" dirty="0">
+                <a:solidFill>
+                  <a:srgbClr val="000066"/>
+                </a:solidFill>
+                <a:latin typeface="微軟正黑體" pitchFamily="34" charset="-120"/>
+                <a:ea typeface="微軟正黑體" pitchFamily="34" charset="-120"/>
+              </a:rPr>
+              <a:t>生命到盡頭的時候來到</a:t>
+            </a:r>
+          </a:p>
+        </p:txBody>
+      </p:sp>
+      <p:sp>
+        <p:nvSpPr>
+          <p:cNvPr id="3" name="TextBox 2">
+            <a:extLst>
+              <a:ext uri="{FF2B5EF4-FFF2-40B4-BE49-F238E27FC236}">
+                <a16:creationId xmlns:a16="http://schemas.microsoft.com/office/drawing/2014/main" id="{8CD7DB86-0599-6402-BE1E-C7EACAD498F8}"/>
+              </a:ext>
+            </a:extLst>
+          </p:cNvPr>
+          <p:cNvSpPr txBox="1"/>
+          <p:nvPr/>
+        </p:nvSpPr>
+        <p:spPr>
+          <a:xfrm>
+            <a:off x="0" y="5362145"/>
+            <a:ext cx="12192000" cy="584775"/>
+          </a:xfrm>
+          <a:prstGeom prst="rect">
+            <a:avLst/>
+          </a:prstGeom>
+          <a:noFill/>
+        </p:spPr>
+        <p:txBody>
+          <a:bodyPr wrap="square" rtlCol="0">
+            <a:spAutoFit/>
+          </a:bodyPr>
+          <a:lstStyle/>
+          <a:p>
+            <a:pPr algn="ctr"/>
+            <a:r>
+              <a:rPr lang="en-US" sz="3200" b="1" dirty="0">
+                <a:solidFill>
+                  <a:srgbClr val="000066"/>
+                </a:solidFill>
+                <a:latin typeface="Microsoft JhengHei" panose="020B0604030504040204" pitchFamily="34" charset="-120"/>
+                <a:ea typeface="Microsoft JhengHei" panose="020B0604030504040204" pitchFamily="34" charset="-120"/>
+              </a:rPr>
+              <a:t>( </a:t>
+            </a:r>
+            <a:r>
+              <a:rPr lang="zh-CN" altLang="en-US" sz="3200" b="1" dirty="0">
+                <a:solidFill>
+                  <a:srgbClr val="000066"/>
+                </a:solidFill>
+                <a:latin typeface="Microsoft JhengHei" panose="020B0604030504040204" pitchFamily="34" charset="-120"/>
+                <a:ea typeface="Microsoft JhengHei" panose="020B0604030504040204" pitchFamily="34" charset="-120"/>
+              </a:rPr>
+              <a:t>正歌 </a:t>
+            </a:r>
+            <a:r>
+              <a:rPr lang="en-US" altLang="zh-CN" sz="3200" b="1" dirty="0">
+                <a:solidFill>
+                  <a:srgbClr val="000066"/>
+                </a:solidFill>
+                <a:latin typeface="Microsoft JhengHei" panose="020B0604030504040204" pitchFamily="34" charset="-120"/>
+                <a:ea typeface="Microsoft JhengHei" panose="020B0604030504040204" pitchFamily="34" charset="-120"/>
+              </a:rPr>
+              <a:t>3</a:t>
+            </a:r>
+            <a:r>
+              <a:rPr lang="en-US" sz="3200" b="1" dirty="0">
+                <a:solidFill>
+                  <a:srgbClr val="000066"/>
+                </a:solidFill>
+                <a:latin typeface="Microsoft JhengHei" panose="020B0604030504040204" pitchFamily="34" charset="-120"/>
+                <a:ea typeface="Microsoft JhengHei" panose="020B0604030504040204" pitchFamily="34" charset="-120"/>
+              </a:rPr>
+              <a:t> )</a:t>
+            </a:r>
+            <a:endParaRPr lang="vi-VN" sz="3200" b="1" dirty="0">
+              <a:solidFill>
+                <a:srgbClr val="000066"/>
+              </a:solidFill>
+              <a:ea typeface="Microsoft JhengHei" panose="020B0604030504040204" pitchFamily="34" charset="-120"/>
+            </a:endParaRPr>
+          </a:p>
+        </p:txBody>
+      </p:sp>
+    </p:spTree>
+    <p:extLst>
+      <p:ext uri="{BB962C8B-B14F-4D97-AF65-F5344CB8AC3E}">
+        <p14:creationId xmlns:p14="http://schemas.microsoft.com/office/powerpoint/2010/main" val="2515667703"/>
+      </p:ext>
+    </p:extLst>
+  </p:cSld>
+  <p:clrMapOvr>
+    <a:masterClrMapping/>
+  </p:clrMapOvr>
+</p:sld>
+</file>
+
+<file path=ppt/slides/slide9.xml><?xml version="1.0" encoding="utf-8"?>
+<p:sld xmlns:a="http://schemas.openxmlformats.org/drawingml/2006/main" xmlns:r="http://schemas.openxmlformats.org/officeDocument/2006/relationships" xmlns:p="http://schemas.openxmlformats.org/presentationml/2006/main">
+  <p:cSld>
+    <p:spTree>
+      <p:nvGrpSpPr>
+        <p:cNvPr id="1" name="">
+          <a:extLst>
+            <a:ext uri="{FF2B5EF4-FFF2-40B4-BE49-F238E27FC236}">
+              <a16:creationId xmlns:a16="http://schemas.microsoft.com/office/drawing/2014/main" id="{0B8C1C27-CFD3-0556-F413-56E263C8544F}"/>
+            </a:ext>
+          </a:extLst>
+        </p:cNvPr>
+        <p:cNvGrpSpPr/>
+        <p:nvPr/>
+      </p:nvGrpSpPr>
+      <p:grpSpPr>
+        <a:xfrm>
+          <a:off x="0" y="0"/>
+          <a:ext cx="0" cy="0"/>
+          <a:chOff x="0" y="0"/>
+          <a:chExt cx="0" cy="0"/>
+        </a:xfrm>
+      </p:grpSpPr>
+      <p:sp>
+        <p:nvSpPr>
+          <p:cNvPr id="5" name="內容版面配置區 4">
+            <a:extLst>
+              <a:ext uri="{FF2B5EF4-FFF2-40B4-BE49-F238E27FC236}">
+                <a16:creationId xmlns:a16="http://schemas.microsoft.com/office/drawing/2014/main" id="{E292F52B-D30A-1A63-7086-864A6965E2E7}"/>
+              </a:ext>
+            </a:extLst>
+          </p:cNvPr>
+          <p:cNvSpPr>
+            <a:spLocks noGrp="1"/>
+          </p:cNvSpPr>
+          <p:nvPr>
+            <p:ph idx="1"/>
+          </p:nvPr>
+        </p:nvSpPr>
+        <p:spPr>
+          <a:xfrm>
+            <a:off x="0" y="2084851"/>
+            <a:ext cx="12192000" cy="2404863"/>
+          </a:xfrm>
+        </p:spPr>
+        <p:txBody>
+          <a:bodyPr anchor="ctr">
+            <a:normAutofit/>
+          </a:bodyPr>
+          <a:lstStyle/>
+          <a:p>
+            <a:pPr algn="ctr">
+              <a:buNone/>
+            </a:pPr>
+            <a:r>
+              <a:rPr lang="zh-TW" altLang="en-US" sz="6400" b="1" dirty="0">
+                <a:solidFill>
+                  <a:srgbClr val="000066"/>
+                </a:solidFill>
+                <a:latin typeface="微軟正黑體" pitchFamily="34" charset="-120"/>
+                <a:ea typeface="微軟正黑體" pitchFamily="34" charset="-120"/>
+              </a:rPr>
+              <a:t>我心堅定  無止盡歌頌祢 </a:t>
+            </a:r>
+          </a:p>
+          <a:p>
+            <a:pPr algn="ctr">
+              <a:buNone/>
+            </a:pPr>
+            <a:r>
+              <a:rPr lang="zh-TW" altLang="en-US" sz="6400" b="1" dirty="0">
+                <a:solidFill>
+                  <a:srgbClr val="000066"/>
+                </a:solidFill>
+                <a:latin typeface="微軟正黑體" pitchFamily="34" charset="-120"/>
+                <a:ea typeface="微軟正黑體" pitchFamily="34" charset="-120"/>
+              </a:rPr>
+              <a:t>千萬年一直到永永遠遠</a:t>
+            </a:r>
+          </a:p>
+        </p:txBody>
+      </p:sp>
+      <p:sp>
+        <p:nvSpPr>
+          <p:cNvPr id="3" name="TextBox 2">
+            <a:extLst>
+              <a:ext uri="{FF2B5EF4-FFF2-40B4-BE49-F238E27FC236}">
+                <a16:creationId xmlns:a16="http://schemas.microsoft.com/office/drawing/2014/main" id="{9D211D5A-1E85-9151-633E-E2A97EA94A6B}"/>
+              </a:ext>
+            </a:extLst>
+          </p:cNvPr>
+          <p:cNvSpPr txBox="1"/>
+          <p:nvPr/>
+        </p:nvSpPr>
+        <p:spPr>
+          <a:xfrm>
+            <a:off x="0" y="5362145"/>
+            <a:ext cx="12192000" cy="584775"/>
+          </a:xfrm>
+          <a:prstGeom prst="rect">
+            <a:avLst/>
+          </a:prstGeom>
+          <a:noFill/>
+        </p:spPr>
+        <p:txBody>
+          <a:bodyPr wrap="square" rtlCol="0">
+            <a:spAutoFit/>
+          </a:bodyPr>
+          <a:lstStyle/>
+          <a:p>
+            <a:pPr algn="ctr"/>
+            <a:r>
+              <a:rPr lang="en-US" sz="3200" b="1" dirty="0">
+                <a:solidFill>
+                  <a:srgbClr val="000066"/>
+                </a:solidFill>
+                <a:latin typeface="Microsoft JhengHei" panose="020B0604030504040204" pitchFamily="34" charset="-120"/>
+                <a:ea typeface="Microsoft JhengHei" panose="020B0604030504040204" pitchFamily="34" charset="-120"/>
+              </a:rPr>
+              <a:t>( </a:t>
+            </a:r>
+            <a:r>
+              <a:rPr lang="zh-CN" altLang="en-US" sz="3200" b="1" dirty="0">
+                <a:solidFill>
+                  <a:srgbClr val="000066"/>
+                </a:solidFill>
+                <a:latin typeface="Microsoft JhengHei" panose="020B0604030504040204" pitchFamily="34" charset="-120"/>
+                <a:ea typeface="Microsoft JhengHei" panose="020B0604030504040204" pitchFamily="34" charset="-120"/>
+              </a:rPr>
+              <a:t>正歌 </a:t>
+            </a:r>
+            <a:r>
+              <a:rPr lang="en-US" altLang="zh-CN" sz="3200" b="1" dirty="0">
+                <a:solidFill>
+                  <a:srgbClr val="000066"/>
+                </a:solidFill>
+                <a:latin typeface="Microsoft JhengHei" panose="020B0604030504040204" pitchFamily="34" charset="-120"/>
+                <a:ea typeface="Microsoft JhengHei" panose="020B0604030504040204" pitchFamily="34" charset="-120"/>
+              </a:rPr>
+              <a:t>3</a:t>
+            </a:r>
+            <a:r>
+              <a:rPr lang="en-US" sz="3200" b="1" dirty="0">
+                <a:solidFill>
+                  <a:srgbClr val="000066"/>
+                </a:solidFill>
+                <a:latin typeface="Microsoft JhengHei" panose="020B0604030504040204" pitchFamily="34" charset="-120"/>
+                <a:ea typeface="Microsoft JhengHei" panose="020B0604030504040204" pitchFamily="34" charset="-120"/>
+              </a:rPr>
+              <a:t> )</a:t>
+            </a:r>
+            <a:endParaRPr lang="vi-VN" sz="3200" b="1" dirty="0">
+              <a:solidFill>
+                <a:srgbClr val="000066"/>
+              </a:solidFill>
+              <a:ea typeface="Microsoft JhengHei" panose="020B0604030504040204" pitchFamily="34" charset="-120"/>
+            </a:endParaRPr>
+          </a:p>
+        </p:txBody>
+      </p:sp>
+    </p:spTree>
+    <p:extLst>
+      <p:ext uri="{BB962C8B-B14F-4D97-AF65-F5344CB8AC3E}">
+        <p14:creationId xmlns:p14="http://schemas.microsoft.com/office/powerpoint/2010/main" val="2350039328"/>
       </p:ext>
     </p:extLst>
   </p:cSld>
@@ -4215,7 +4554,7 @@
 </file>
 
 <file path=ppt/theme/theme1.xml><?xml version="1.0" encoding="utf-8"?>
-<a:theme xmlns:a="http://schemas.openxmlformats.org/drawingml/2006/main" name="Church Theme">
+<a:theme xmlns:a="http://schemas.openxmlformats.org/drawingml/2006/main" name="Theme1">
   <a:themeElements>
     <a:clrScheme name="Office">
       <a:dk1>
@@ -4494,5 +4833,10 @@
   </a:themeElements>
   <a:objectDefaults/>
   <a:extraClrSchemeLst/>
+  <a:extLst>
+    <a:ext uri="{05A4C25C-085E-4340-85A3-A5531E510DB2}">
+      <thm15:themeFamily xmlns:thm15="http://schemas.microsoft.com/office/thememl/2012/main" name="中文詩歌儲存" id="{E0DF756C-B689-4A49-A343-6050050733AA}" vid="{979C1A4B-FDC7-484D-A782-7FA72675E23C}"/>
+    </a:ext>
+  </a:extLst>
 </a:theme>
 </file>